--- a/Y9_Exploring_Science/9A_Genetics_and_evolution/9A_L03_Probability_and_statistics.pptx
+++ b/Y9_Exploring_Science/9A_Genetics_and_evolution/9A_L03_Probability_and_statistics.pptx
@@ -131,7 +131,7 @@
           <a:lstStyle/>
           <a:p>
             <a:pPr>
-              <a:defRPr sz="1400" b="0" i="0" u="none" strike="noStrike">
+              <a:defRPr sz="1600" b="0" i="0" u="none" strike="noStrike">
                 <a:solidFill>
                   <a:srgbClr val="0F2A5F"/>
                 </a:solidFill>
@@ -139,7 +139,7 @@
               </a:defRPr>
             </a:pPr>
             <a:r>
-              <a:rPr sz="1400" b="0" i="0" u="none" strike="noStrike">
+              <a:rPr sz="1600" b="0" i="0" u="none" strike="noStrike">
                 <a:solidFill>
                   <a:srgbClr val="0F2A5F"/>
                 </a:solidFill>
@@ -188,7 +188,7 @@
               <a:lstStyle/>
               <a:p>
                 <a:pPr>
-                  <a:defRPr b="0" i="0" strike="noStrike" sz="1000" u="none">
+                  <a:defRPr b="0" i="0" strike="noStrike" sz="1200" u="none">
                     <a:solidFill>
                       <a:srgbClr val="141B26"/>
                     </a:solidFill>
@@ -262,7 +262,7 @@
             <a:lstStyle/>
             <a:p>
               <a:pPr>
-                <a:defRPr b="0" i="0" strike="noStrike" sz="1000" u="none">
+                <a:defRPr b="0" i="0" strike="noStrike" sz="1200" u="none">
                   <a:solidFill>
                     <a:srgbClr val="141B26"/>
                   </a:solidFill>
@@ -299,7 +299,7 @@
               <a:lstStyle/>
               <a:p>
                 <a:pPr>
-                  <a:defRPr sz="1100" b="0" i="0" u="none" strike="noStrike">
+                  <a:defRPr sz="1300" b="0" i="0" u="none" strike="noStrike">
                     <a:solidFill>
                       <a:srgbClr val="141B26"/>
                     </a:solidFill>
@@ -307,7 +307,7 @@
                   </a:defRPr>
                 </a:pPr>
                 <a:r>
-                  <a:rPr sz="1100" b="0" i="0" u="none" strike="noStrike">
+                  <a:rPr sz="1300" b="0" i="0" u="none" strike="noStrike">
                     <a:solidFill>
                       <a:srgbClr val="141B26"/>
                     </a:solidFill>
@@ -339,7 +339,7 @@
           <a:lstStyle/>
           <a:p>
             <a:pPr>
-              <a:defRPr sz="1100" b="0" i="0" u="none" strike="noStrike">
+              <a:defRPr sz="1300" b="0" i="0" u="none" strike="noStrike">
                 <a:solidFill>
                   <a:srgbClr val="141B26"/>
                 </a:solidFill>
@@ -380,7 +380,7 @@
               <a:lstStyle/>
               <a:p>
                 <a:pPr>
-                  <a:defRPr sz="1100" b="0" i="0" u="none" strike="noStrike">
+                  <a:defRPr sz="1300" b="0" i="0" u="none" strike="noStrike">
                     <a:solidFill>
                       <a:srgbClr val="141B26"/>
                     </a:solidFill>
@@ -388,7 +388,7 @@
                   </a:defRPr>
                 </a:pPr>
                 <a:r>
-                  <a:rPr sz="1100" b="0" i="0" u="none" strike="noStrike">
+                  <a:rPr sz="1300" b="0" i="0" u="none" strike="noStrike">
                     <a:solidFill>
                       <a:srgbClr val="141B26"/>
                     </a:solidFill>
@@ -420,7 +420,7 @@
           <a:lstStyle/>
           <a:p>
             <a:pPr>
-              <a:defRPr sz="1100" b="0" i="0" u="none" strike="noStrike">
+              <a:defRPr sz="1300" b="0" i="0" u="none" strike="noStrike">
                 <a:solidFill>
                   <a:srgbClr val="141B26"/>
                 </a:solidFill>
@@ -2079,7 +2079,7 @@
         <p:spPr>
           <a:xfrm>
             <a:off x="548640" y="3657600"/>
-            <a:ext cx="10515600" cy="914400"/>
+            <a:ext cx="10515600" cy="1097280"/>
           </a:xfrm>
           <a:prstGeom prst="rect">
             <a:avLst/>
@@ -2092,7 +2092,7 @@
           <a:lstStyle>
             <a:lvl1pPr indent="0" marL="0">
               <a:buNone/>
-              <a:defRPr lang="en-US" sz="2000" dirty="0">
+              <a:defRPr lang="en-US" sz="2400" dirty="0">
                 <a:solidFill>
                   <a:srgbClr val="FFFFFF"/>
                 </a:solidFill>
@@ -2103,7 +2103,7 @@
             <a:pPr indent="0" marL="0">
               <a:buNone/>
             </a:pPr>
-            <a:endParaRPr lang="en-US" sz="2000" dirty="0"/>
+            <a:endParaRPr lang="en-US" sz="2400" dirty="0"/>
           </a:p>
         </p:txBody>
       </p:sp>
@@ -2203,14 +2203,14 @@
               <a:buNone/>
             </a:pPr>
             <a:r>
-              <a:rPr lang="en-US" sz="900" dirty="0">
+              <a:rPr lang="en-US" sz="1000" dirty="0">
                 <a:solidFill>
                   <a:srgbClr val="5B6574"/>
                 </a:solidFill>
               </a:rPr>
               <a:t>Year 9 Science  |  9A Genetics and evolution  |  Lesson 3: Probability and statistics</a:t>
             </a:r>
-            <a:endParaRPr lang="en-US" sz="900" dirty="0"/>
+            <a:endParaRPr lang="en-US" sz="1000" dirty="0"/>
           </a:p>
         </p:txBody>
       </p:sp>
@@ -2379,14 +2379,14 @@
               <a:buNone/>
             </a:pPr>
             <a:r>
-              <a:rPr lang="en-US" sz="900" dirty="0">
+              <a:rPr lang="en-US" sz="1000" dirty="0">
                 <a:solidFill>
                   <a:srgbClr val="5B6574"/>
                 </a:solidFill>
               </a:rPr>
               <a:t>Year 9 Science  |  9A Genetics and evolution  |  Lesson 3: Probability and statistics</a:t>
             </a:r>
-            <a:endParaRPr lang="en-US" sz="900" dirty="0"/>
+            <a:endParaRPr lang="en-US" sz="1000" dirty="0"/>
           </a:p>
         </p:txBody>
       </p:sp>
@@ -2555,14 +2555,14 @@
               <a:buNone/>
             </a:pPr>
             <a:r>
-              <a:rPr lang="en-US" sz="900" dirty="0">
+              <a:rPr lang="en-US" sz="1000" dirty="0">
                 <a:solidFill>
                   <a:srgbClr val="5B6574"/>
                 </a:solidFill>
               </a:rPr>
               <a:t>Year 9 Science  |  9A Genetics and evolution  |  Lesson 3: Probability and statistics</a:t>
             </a:r>
-            <a:endParaRPr lang="en-US" sz="900" dirty="0"/>
+            <a:endParaRPr lang="en-US" sz="1000" dirty="0"/>
           </a:p>
         </p:txBody>
       </p:sp>
@@ -2691,7 +2691,7 @@
           <a:lstStyle>
             <a:lvl1pPr indent="0" marL="0">
               <a:buNone/>
-              <a:defRPr lang="en-US" sz="3000" b="1" dirty="0">
+              <a:defRPr lang="en-US" sz="3400" b="1" dirty="0">
                 <a:solidFill>
                   <a:srgbClr val="3A2E00"/>
                 </a:solidFill>
@@ -2702,7 +2702,7 @@
             <a:pPr indent="0" marL="0">
               <a:buNone/>
             </a:pPr>
-            <a:endParaRPr lang="en-US" sz="3000" dirty="0"/>
+            <a:endParaRPr lang="en-US" sz="3400" dirty="0"/>
           </a:p>
         </p:txBody>
       </p:sp>
@@ -3119,14 +3119,14 @@
               <a:buNone/>
             </a:pPr>
             <a:r>
-              <a:rPr lang="en-US" sz="1300" b="1" spc="200" kern="0" dirty="0">
+              <a:rPr lang="en-US" sz="1400" b="1" spc="200" kern="0" dirty="0">
                 <a:solidFill>
                   <a:srgbClr val="F2CE3E"/>
                 </a:solidFill>
               </a:rPr>
               <a:t>YEAR 9 SCIENCE  ·  9A GENETICS AND EVOLUTION  ·  LESSON 3 OF 7</a:t>
             </a:r>
-            <a:endParaRPr lang="en-US" sz="1300" dirty="0"/>
+            <a:endParaRPr lang="en-US" sz="1400" dirty="0"/>
           </a:p>
         </p:txBody>
       </p:sp>
@@ -3179,7 +3179,7 @@
         <p:spPr>
           <a:xfrm>
             <a:off x="548640" y="3657600"/>
-            <a:ext cx="10515600" cy="914400"/>
+            <a:ext cx="10515600" cy="1097280"/>
           </a:xfrm>
           <a:prstGeom prst="rect">
             <a:avLst/>
@@ -3195,14 +3195,14 @@
               <a:buNone/>
             </a:pPr>
             <a:r>
-              <a:rPr lang="en-US" sz="2000" dirty="0">
+              <a:rPr lang="en-US" sz="2400" dirty="0">
                 <a:solidFill>
                   <a:srgbClr val="FFFFFF"/>
                 </a:solidFill>
               </a:rPr>
               <a:t>How do scientists use statistics and probability?</a:t>
             </a:r>
-            <a:endParaRPr lang="en-US" sz="2000" dirty="0"/>
+            <a:endParaRPr lang="en-US" sz="2400" dirty="0"/>
           </a:p>
         </p:txBody>
       </p:sp>
@@ -3231,14 +3231,14 @@
               <a:buNone/>
             </a:pPr>
             <a:r>
-              <a:rPr lang="en-US" sz="1200" dirty="0">
+              <a:rPr lang="en-US" sz="1400" dirty="0">
                 <a:solidFill>
                   <a:srgbClr val="C9D3E6"/>
                 </a:solidFill>
               </a:rPr>
               <a:t>Exploring Science International 9  ·  Student Book pages 10 to 11  ·  Workbook pages 7</a:t>
             </a:r>
-            <a:endParaRPr lang="en-US" sz="1200" dirty="0"/>
+            <a:endParaRPr lang="en-US" sz="1400" dirty="0"/>
           </a:p>
         </p:txBody>
       </p:sp>
@@ -3417,7 +3417,7 @@
               <a:buNone/>
             </a:pPr>
             <a:r>
-              <a:rPr lang="en-US" sz="1500" b="1" dirty="0">
+              <a:rPr lang="en-US" sz="1800" b="1" dirty="0">
                 <a:solidFill>
                   <a:srgbClr val="7B3A8E"/>
                 </a:solidFill>
@@ -3428,14 +3428,14 @@
               <a:buNone/>
             </a:pPr>
             <a:r>
-              <a:rPr lang="en-US" sz="1500" dirty="0">
+              <a:rPr lang="en-US" sz="1800" dirty="0">
                 <a:solidFill>
                   <a:srgbClr val="141B26"/>
                 </a:solidFill>
               </a:rPr>
               <a:t>Find the experimental probability of each score (2 to 12) when two dice are thrown and added.</a:t>
             </a:r>
-            <a:endParaRPr lang="en-US" sz="1500" dirty="0"/>
+            <a:endParaRPr lang="en-US" sz="1800" dirty="0"/>
           </a:p>
         </p:txBody>
       </p:sp>
@@ -3464,14 +3464,14 @@
               <a:buNone/>
             </a:pPr>
             <a:r>
-              <a:rPr lang="en-US" sz="1600" b="1" dirty="0">
+              <a:rPr lang="en-US" sz="1800" b="1" dirty="0">
                 <a:solidFill>
                   <a:srgbClr val="0F2A5F"/>
                 </a:solidFill>
               </a:rPr>
               <a:t>Equipment</a:t>
             </a:r>
-            <a:endParaRPr lang="en-US" sz="1600" dirty="0"/>
+            <a:endParaRPr lang="en-US" sz="1800" dirty="0"/>
           </a:p>
         </p:txBody>
       </p:sp>
@@ -3493,218 +3493,214 @@
           <a:ln/>
         </p:spPr>
         <p:txBody>
-          <a:bodyPr wrap="square" lIns="0" tIns="0" rIns="0" bIns="0" rtlCol="0" anchor="t">
-            <a:normAutofit/>
-          </a:bodyPr>
-          <a:lstStyle/>
-          <a:p>
-            <a:pPr marL="228600" indent="-228600">
+          <a:bodyPr wrap="square" lIns="0" tIns="0" rIns="0" bIns="0" rtlCol="0" anchor="t"/>
+          <a:lstStyle/>
+          <a:p>
+            <a:pPr marL="304800" indent="-304800">
+              <a:spcAft>
+                <a:spcPts val="800"/>
+              </a:spcAft>
+              <a:buSzPct val="100000"/>
+              <a:buChar char="•"/>
+            </a:pPr>
+            <a:r>
+              <a:rPr lang="en-US" sz="1600" dirty="0">
+                <a:solidFill>
+                  <a:srgbClr val="141B26"/>
+                </a:solidFill>
+              </a:rPr>
+              <a:t>Two dice</a:t>
+            </a:r>
+            <a:endParaRPr lang="en-US" sz="1600" dirty="0"/>
+          </a:p>
+          <a:p>
+            <a:pPr marL="304800" indent="-304800">
+              <a:spcAft>
+                <a:spcPts val="800"/>
+              </a:spcAft>
+              <a:buSzPct val="100000"/>
+              <a:buChar char="•"/>
+            </a:pPr>
+            <a:r>
+              <a:rPr lang="en-US" sz="1600" dirty="0">
+                <a:solidFill>
+                  <a:srgbClr val="141B26"/>
+                </a:solidFill>
+              </a:rPr>
+              <a:t>Worksheet tally table (Core question 3)</a:t>
+            </a:r>
+            <a:endParaRPr lang="en-US" sz="1600" dirty="0"/>
+          </a:p>
+          <a:p>
+            <a:pPr marL="304800" indent="-304800">
+              <a:spcAft>
+                <a:spcPts val="800"/>
+              </a:spcAft>
+              <a:buSzPct val="100000"/>
+              <a:buChar char="•"/>
+            </a:pPr>
+            <a:r>
+              <a:rPr lang="en-US" sz="1600" dirty="0">
+                <a:solidFill>
+                  <a:srgbClr val="141B26"/>
+                </a:solidFill>
+              </a:rPr>
+              <a:t>Calculator (optional)</a:t>
+            </a:r>
+            <a:endParaRPr lang="en-US" sz="1600" dirty="0"/>
+          </a:p>
+        </p:txBody>
+      </p:sp>
+      <p:sp>
+        <p:nvSpPr>
+          <p:cNvPr id="8" name="Text 6"/>
+          <p:cNvSpPr txBox="1"/>
+          <p:nvPr/>
+        </p:nvSpPr>
+        <p:spPr>
+          <a:xfrm>
+            <a:off x="4937760" y="1828800"/>
+            <a:ext cx="6675120" cy="365760"/>
+          </a:xfrm>
+          <a:prstGeom prst="rect">
+            <a:avLst/>
+          </a:prstGeom>
+          <a:noFill/>
+          <a:ln/>
+        </p:spPr>
+        <p:txBody>
+          <a:bodyPr wrap="square" lIns="0" tIns="0" rIns="0" bIns="0" rtlCol="0" anchor="ctr"/>
+          <a:lstStyle/>
+          <a:p>
+            <a:pPr indent="0" marL="0">
+              <a:buNone/>
+            </a:pPr>
+            <a:r>
+              <a:rPr lang="en-US" sz="1800" b="1" dirty="0">
+                <a:solidFill>
+                  <a:srgbClr val="0F2A5F"/>
+                </a:solidFill>
+              </a:rPr>
+              <a:t>Method</a:t>
+            </a:r>
+            <a:endParaRPr lang="en-US" sz="1800" dirty="0"/>
+          </a:p>
+        </p:txBody>
+      </p:sp>
+      <p:sp>
+        <p:nvSpPr>
+          <p:cNvPr id="9" name="Text 7"/>
+          <p:cNvSpPr txBox="1"/>
+          <p:nvPr/>
+        </p:nvSpPr>
+        <p:spPr>
+          <a:xfrm>
+            <a:off x="4937760" y="2240280"/>
+            <a:ext cx="6675120" cy="3200400"/>
+          </a:xfrm>
+          <a:prstGeom prst="rect">
+            <a:avLst/>
+          </a:prstGeom>
+          <a:noFill/>
+          <a:ln/>
+        </p:spPr>
+        <p:txBody>
+          <a:bodyPr wrap="square" lIns="0" tIns="0" rIns="0" bIns="0" rtlCol="0" anchor="t"/>
+          <a:lstStyle/>
+          <a:p>
+            <a:pPr marL="342900" indent="-342900">
               <a:spcAft>
                 <a:spcPts val="600"/>
               </a:spcAft>
               <a:buSzPct val="100000"/>
-              <a:buChar char="•"/>
-            </a:pPr>
-            <a:r>
-              <a:rPr lang="en-US" sz="1300" dirty="0">
+              <a:buFont typeface="+mj-lt"/>
+              <a:buAutoNum type="arabicPeriod" startAt="1"/>
+            </a:pPr>
+            <a:r>
+              <a:rPr lang="en-US" sz="1600" dirty="0">
                 <a:solidFill>
                   <a:srgbClr val="141B26"/>
                 </a:solidFill>
               </a:rPr>
-              <a:t>Two dice</a:t>
-            </a:r>
-            <a:endParaRPr lang="en-US" sz="1300" dirty="0"/>
-          </a:p>
-          <a:p>
-            <a:pPr marL="228600" indent="-228600">
+              <a:t>Throw both dice and add the two numbers to get the score.</a:t>
+            </a:r>
+            <a:endParaRPr lang="en-US" sz="1600" dirty="0"/>
+          </a:p>
+          <a:p>
+            <a:pPr marL="342900" indent="-342900">
               <a:spcAft>
                 <a:spcPts val="600"/>
               </a:spcAft>
               <a:buSzPct val="100000"/>
-              <a:buChar char="•"/>
-            </a:pPr>
-            <a:r>
-              <a:rPr lang="en-US" sz="1300" dirty="0">
+              <a:buFont typeface="+mj-lt"/>
+              <a:buAutoNum type="arabicPeriod" startAt="1"/>
+            </a:pPr>
+            <a:r>
+              <a:rPr lang="en-US" sz="1600" dirty="0">
                 <a:solidFill>
                   <a:srgbClr val="141B26"/>
                 </a:solidFill>
               </a:rPr>
-              <a:t>Worksheet tally table (Core question 3)</a:t>
-            </a:r>
-            <a:endParaRPr lang="en-US" sz="1300" dirty="0"/>
-          </a:p>
-          <a:p>
-            <a:pPr marL="228600" indent="-228600">
+              <a:t>Record a tally mark next to that score. Repeat until you have 50 throws.</a:t>
+            </a:r>
+            <a:endParaRPr lang="en-US" sz="1600" dirty="0"/>
+          </a:p>
+          <a:p>
+            <a:pPr marL="342900" indent="-342900">
               <a:spcAft>
                 <a:spcPts val="600"/>
               </a:spcAft>
               <a:buSzPct val="100000"/>
-              <a:buChar char="•"/>
-            </a:pPr>
-            <a:r>
-              <a:rPr lang="en-US" sz="1300" dirty="0">
+              <a:buFont typeface="+mj-lt"/>
+              <a:buAutoNum type="arabicPeriod" startAt="1"/>
+            </a:pPr>
+            <a:r>
+              <a:rPr lang="en-US" sz="1600" dirty="0">
                 <a:solidFill>
                   <a:srgbClr val="141B26"/>
                 </a:solidFill>
               </a:rPr>
-              <a:t>Calculator (optional)</a:t>
-            </a:r>
-            <a:endParaRPr lang="en-US" sz="1300" dirty="0"/>
-          </a:p>
-        </p:txBody>
-      </p:sp>
-      <p:sp>
-        <p:nvSpPr>
-          <p:cNvPr id="8" name="Text 6"/>
-          <p:cNvSpPr txBox="1"/>
-          <p:nvPr/>
-        </p:nvSpPr>
-        <p:spPr>
-          <a:xfrm>
-            <a:off x="4937760" y="1828800"/>
-            <a:ext cx="6675120" cy="365760"/>
-          </a:xfrm>
-          <a:prstGeom prst="rect">
-            <a:avLst/>
-          </a:prstGeom>
-          <a:noFill/>
-          <a:ln/>
-        </p:spPr>
-        <p:txBody>
-          <a:bodyPr wrap="square" lIns="0" tIns="0" rIns="0" bIns="0" rtlCol="0" anchor="ctr"/>
-          <a:lstStyle/>
-          <a:p>
-            <a:pPr indent="0" marL="0">
-              <a:buNone/>
-            </a:pPr>
-            <a:r>
-              <a:rPr lang="en-US" sz="1600" b="1" dirty="0">
-                <a:solidFill>
-                  <a:srgbClr val="0F2A5F"/>
-                </a:solidFill>
-              </a:rPr>
-              <a:t>Method</a:t>
+              <a:t>Count the tallies to find the frequency of each score.</a:t>
             </a:r>
             <a:endParaRPr lang="en-US" sz="1600" dirty="0"/>
           </a:p>
-        </p:txBody>
-      </p:sp>
-      <p:sp>
-        <p:nvSpPr>
-          <p:cNvPr id="9" name="Text 7"/>
-          <p:cNvSpPr txBox="1"/>
-          <p:nvPr/>
-        </p:nvSpPr>
-        <p:spPr>
-          <a:xfrm>
-            <a:off x="4937760" y="2240280"/>
-            <a:ext cx="6675120" cy="3200400"/>
-          </a:xfrm>
-          <a:prstGeom prst="rect">
-            <a:avLst/>
-          </a:prstGeom>
-          <a:noFill/>
-          <a:ln/>
-        </p:spPr>
-        <p:txBody>
-          <a:bodyPr wrap="square" lIns="0" tIns="0" rIns="0" bIns="0" rtlCol="0" anchor="t">
-            <a:normAutofit/>
-          </a:bodyPr>
-          <a:lstStyle/>
           <a:p>
             <a:pPr marL="342900" indent="-342900">
               <a:spcAft>
-                <a:spcPts val="500"/>
+                <a:spcPts val="600"/>
               </a:spcAft>
               <a:buSzPct val="100000"/>
               <a:buFont typeface="+mj-lt"/>
               <a:buAutoNum type="arabicPeriod" startAt="1"/>
             </a:pPr>
             <a:r>
-              <a:rPr lang="en-US" sz="1300" dirty="0">
+              <a:rPr lang="en-US" sz="1600" dirty="0">
                 <a:solidFill>
                   <a:srgbClr val="141B26"/>
                 </a:solidFill>
               </a:rPr>
-              <a:t>Throw both dice and add the two numbers to get the score.</a:t>
-            </a:r>
-            <a:endParaRPr lang="en-US" sz="1300" dirty="0"/>
+              <a:t>Experimental probability = frequency divided by 50. Write it as a fraction, a decimal and a percentage.</a:t>
+            </a:r>
+            <a:endParaRPr lang="en-US" sz="1600" dirty="0"/>
           </a:p>
           <a:p>
             <a:pPr marL="342900" indent="-342900">
               <a:spcAft>
-                <a:spcPts val="500"/>
+                <a:spcPts val="600"/>
               </a:spcAft>
               <a:buSzPct val="100000"/>
               <a:buFont typeface="+mj-lt"/>
               <a:buAutoNum type="arabicPeriod" startAt="1"/>
             </a:pPr>
             <a:r>
-              <a:rPr lang="en-US" sz="1300" dirty="0">
+              <a:rPr lang="en-US" sz="1600" dirty="0">
                 <a:solidFill>
                   <a:srgbClr val="141B26"/>
                 </a:solidFill>
               </a:rPr>
-              <a:t>Record a tally mark next to that score. Repeat until you have 50 throws.</a:t>
-            </a:r>
-            <a:endParaRPr lang="en-US" sz="1300" dirty="0"/>
-          </a:p>
-          <a:p>
-            <a:pPr marL="342900" indent="-342900">
-              <a:spcAft>
-                <a:spcPts val="500"/>
-              </a:spcAft>
-              <a:buSzPct val="100000"/>
-              <a:buFont typeface="+mj-lt"/>
-              <a:buAutoNum type="arabicPeriod" startAt="1"/>
-            </a:pPr>
-            <a:r>
-              <a:rPr lang="en-US" sz="1300" dirty="0">
-                <a:solidFill>
-                  <a:srgbClr val="141B26"/>
-                </a:solidFill>
-              </a:rPr>
-              <a:t>Count the tallies to find the frequency of each score.</a:t>
-            </a:r>
-            <a:endParaRPr lang="en-US" sz="1300" dirty="0"/>
-          </a:p>
-          <a:p>
-            <a:pPr marL="342900" indent="-342900">
-              <a:spcAft>
-                <a:spcPts val="500"/>
-              </a:spcAft>
-              <a:buSzPct val="100000"/>
-              <a:buFont typeface="+mj-lt"/>
-              <a:buAutoNum type="arabicPeriod" startAt="1"/>
-            </a:pPr>
-            <a:r>
-              <a:rPr lang="en-US" sz="1300" dirty="0">
-                <a:solidFill>
-                  <a:srgbClr val="141B26"/>
-                </a:solidFill>
-              </a:rPr>
-              <a:t>Experimental probability = frequency divided by 50. Write it as a fraction, a decimal and a percentage.</a:t>
-            </a:r>
-            <a:endParaRPr lang="en-US" sz="1300" dirty="0"/>
-          </a:p>
-          <a:p>
-            <a:pPr marL="342900" indent="-342900">
-              <a:spcAft>
-                <a:spcPts val="500"/>
-              </a:spcAft>
-              <a:buSzPct val="100000"/>
-              <a:buFont typeface="+mj-lt"/>
-              <a:buAutoNum type="arabicPeriod" startAt="1"/>
-            </a:pPr>
-            <a:r>
-              <a:rPr lang="en-US" sz="1300" dirty="0">
-                <a:solidFill>
-                  <a:srgbClr val="141B26"/>
-                </a:solidFill>
-              </a:rPr>
               <a:t>Compare your result for a score of 7 with the theoretical probability 6/36 (about 17%).</a:t>
             </a:r>
-            <a:endParaRPr lang="en-US" sz="1300" dirty="0"/>
+            <a:endParaRPr lang="en-US" sz="1600" dirty="0"/>
           </a:p>
         </p:txBody>
       </p:sp>
@@ -3751,16 +3747,14 @@
           <a:ln/>
         </p:spPr>
         <p:txBody>
-          <a:bodyPr wrap="square" lIns="0" tIns="0" rIns="0" bIns="0" rtlCol="0" anchor="ctr">
-            <a:normAutofit/>
-          </a:bodyPr>
+          <a:bodyPr wrap="square" lIns="0" tIns="0" rIns="0" bIns="0" rtlCol="0" anchor="ctr"/>
           <a:lstStyle/>
           <a:p>
             <a:pPr indent="0" marL="0">
               <a:buNone/>
             </a:pPr>
             <a:r>
-              <a:rPr lang="en-US" sz="1300" b="1" dirty="0">
+              <a:rPr lang="en-US" sz="1500" b="1" dirty="0">
                 <a:solidFill>
                   <a:srgbClr val="3A2E00"/>
                 </a:solidFill>
@@ -3771,14 +3765,14 @@
               <a:buNone/>
             </a:pPr>
             <a:r>
-              <a:rPr lang="en-US" sz="1300" dirty="0">
+              <a:rPr lang="en-US" sz="1500" dirty="0">
                 <a:solidFill>
                   <a:srgbClr val="3A2E00"/>
                 </a:solidFill>
               </a:rPr>
               <a:t>No hazards. Keep dice on the desk; share the throwing and the recording.</a:t>
             </a:r>
-            <a:endParaRPr lang="en-US" sz="1300" dirty="0"/>
+            <a:endParaRPr lang="en-US" sz="1500" dirty="0"/>
           </a:p>
         </p:txBody>
       </p:sp>
@@ -3971,23 +3965,21 @@
           <a:ln/>
         </p:spPr>
         <p:txBody>
-          <a:bodyPr wrap="square" lIns="0" tIns="0" rIns="0" bIns="0" rtlCol="0" anchor="t">
-            <a:normAutofit/>
-          </a:bodyPr>
+          <a:bodyPr wrap="square" lIns="0" tIns="0" rIns="0" bIns="0" rtlCol="0" anchor="t"/>
           <a:lstStyle/>
           <a:p>
             <a:pPr indent="0" marL="0">
               <a:buNone/>
             </a:pPr>
             <a:r>
-              <a:rPr lang="en-US" sz="2200" b="1" dirty="0">
+              <a:rPr lang="en-US" sz="2600" b="1" dirty="0">
                 <a:solidFill>
                   <a:srgbClr val="0F2A5F"/>
                 </a:solidFill>
               </a:rPr>
               <a:t>If one parent has achondroplasia, each child has a 50% chance of inheriting it. A couple already has two children without it. Is their third child certain to have it?</a:t>
             </a:r>
-            <a:endParaRPr lang="en-US" sz="2200" dirty="0"/>
+            <a:endParaRPr lang="en-US" sz="2600" dirty="0"/>
           </a:p>
         </p:txBody>
       </p:sp>
@@ -4036,9 +4028,7 @@
           <a:ln/>
         </p:spPr>
         <p:txBody>
-          <a:bodyPr wrap="square" lIns="0" tIns="0" rIns="0" bIns="0" rtlCol="0" anchor="t">
-            <a:normAutofit/>
-          </a:bodyPr>
+          <a:bodyPr wrap="square" lIns="0" tIns="0" rIns="0" bIns="0" rtlCol="0" anchor="t"/>
           <a:lstStyle/>
           <a:p>
             <a:pPr indent="0" marL="0">
@@ -4048,14 +4038,14 @@
               <a:buNone/>
             </a:pPr>
             <a:r>
-              <a:rPr lang="en-US" sz="1500" b="1" dirty="0">
+              <a:rPr lang="en-US" sz="1800" b="1" dirty="0">
                 <a:solidFill>
                   <a:srgbClr val="7B3A8E"/>
                 </a:solidFill>
               </a:rPr>
               <a:t>Sentence frames</a:t>
             </a:r>
-            <a:endParaRPr lang="en-US" sz="1500" dirty="0"/>
+            <a:endParaRPr lang="en-US" sz="1800" dirty="0"/>
           </a:p>
           <a:p>
             <a:pPr indent="0" marL="0">
@@ -4065,14 +4055,14 @@
               <a:buNone/>
             </a:pPr>
             <a:r>
-              <a:rPr lang="en-US" sz="1500" dirty="0">
+              <a:rPr lang="en-US" sz="1800" dirty="0">
                 <a:solidFill>
                   <a:srgbClr val="141B26"/>
                 </a:solidFill>
               </a:rPr>
               <a:t>The probability for the third child is still ___ because ___.</a:t>
             </a:r>
-            <a:endParaRPr lang="en-US" sz="1500" dirty="0"/>
+            <a:endParaRPr lang="en-US" sz="1800" dirty="0"/>
           </a:p>
           <a:p>
             <a:pPr indent="0" marL="0">
@@ -4082,14 +4072,14 @@
               <a:buNone/>
             </a:pPr>
             <a:r>
-              <a:rPr lang="en-US" sz="1500" dirty="0">
+              <a:rPr lang="en-US" sz="1800" dirty="0">
                 <a:solidFill>
                   <a:srgbClr val="141B26"/>
                 </a:solidFill>
               </a:rPr>
               <a:t>Each child is a separate event, like ___.</a:t>
             </a:r>
-            <a:endParaRPr lang="en-US" sz="1500" dirty="0"/>
+            <a:endParaRPr lang="en-US" sz="1800" dirty="0"/>
           </a:p>
           <a:p>
             <a:pPr indent="0" marL="0">
@@ -4099,14 +4089,14 @@
               <a:buNone/>
             </a:pPr>
             <a:r>
-              <a:rPr lang="en-US" sz="1500" dirty="0">
+              <a:rPr lang="en-US" sz="1800" dirty="0">
                 <a:solidFill>
                   <a:srgbClr val="141B26"/>
                 </a:solidFill>
               </a:rPr>
               <a:t>'Certain' would mean a probability of ___.</a:t>
             </a:r>
-            <a:endParaRPr lang="en-US" sz="1500" dirty="0"/>
+            <a:endParaRPr lang="en-US" sz="1800" dirty="0"/>
           </a:p>
         </p:txBody>
       </p:sp>
@@ -4306,14 +4296,14 @@
               <a:buNone/>
             </a:pPr>
             <a:r>
-              <a:rPr lang="en-US" sz="1400" i="1" dirty="0">
+              <a:rPr lang="en-US" sz="1600" i="1" dirty="0">
                 <a:solidFill>
                   <a:srgbClr val="5B6574"/>
                 </a:solidFill>
               </a:rPr>
               <a:t>On your worksheet exit ticket. Work alone. Hand it in as you leave.</a:t>
             </a:r>
-            <a:endParaRPr lang="en-US" sz="1400" dirty="0"/>
+            <a:endParaRPr lang="en-US" sz="1600" dirty="0"/>
           </a:p>
         </p:txBody>
       </p:sp>
@@ -4326,7 +4316,7 @@
         <p:spPr>
           <a:xfrm>
             <a:off x="548640" y="1828800"/>
-            <a:ext cx="10881360" cy="1188720"/>
+            <a:ext cx="9692640" cy="1188720"/>
           </a:xfrm>
           <a:prstGeom prst="rect">
             <a:avLst/>
@@ -4335,16 +4325,14 @@
           <a:ln/>
         </p:spPr>
         <p:txBody>
-          <a:bodyPr wrap="square" lIns="0" tIns="0" rIns="0" bIns="0" rtlCol="0" anchor="t">
-            <a:normAutofit/>
-          </a:bodyPr>
+          <a:bodyPr wrap="square" lIns="0" tIns="0" rIns="0" bIns="0" rtlCol="0" anchor="t"/>
           <a:lstStyle/>
           <a:p>
             <a:pPr indent="0" marL="0">
               <a:buNone/>
             </a:pPr>
             <a:r>
-              <a:rPr lang="en-US" sz="1800" b="1" dirty="0">
+              <a:rPr lang="en-US" sz="2200" b="1" dirty="0">
                 <a:solidFill>
                   <a:srgbClr val="7B3A8E"/>
                 </a:solidFill>
@@ -4355,14 +4343,14 @@
               <a:buNone/>
             </a:pPr>
             <a:r>
-              <a:rPr lang="en-US" sz="1800" dirty="0">
+              <a:rPr lang="en-US" sz="2200" dirty="0">
                 <a:solidFill>
                   <a:srgbClr val="141B26"/>
                 </a:solidFill>
               </a:rPr>
               <a:t>What is probability?</a:t>
             </a:r>
-            <a:endParaRPr lang="en-US" sz="1800" dirty="0"/>
+            <a:endParaRPr lang="en-US" sz="2200" dirty="0"/>
           </a:p>
         </p:txBody>
       </p:sp>
@@ -4375,7 +4363,7 @@
         <p:spPr>
           <a:xfrm>
             <a:off x="548640" y="3017520"/>
-            <a:ext cx="10881360" cy="1188720"/>
+            <a:ext cx="9692640" cy="1188720"/>
           </a:xfrm>
           <a:prstGeom prst="rect">
             <a:avLst/>
@@ -4384,16 +4372,14 @@
           <a:ln/>
         </p:spPr>
         <p:txBody>
-          <a:bodyPr wrap="square" lIns="0" tIns="0" rIns="0" bIns="0" rtlCol="0" anchor="t">
-            <a:normAutofit/>
-          </a:bodyPr>
+          <a:bodyPr wrap="square" lIns="0" tIns="0" rIns="0" bIns="0" rtlCol="0" anchor="t"/>
           <a:lstStyle/>
           <a:p>
             <a:pPr indent="0" marL="0">
               <a:buNone/>
             </a:pPr>
             <a:r>
-              <a:rPr lang="en-US" sz="1800" b="1" dirty="0">
+              <a:rPr lang="en-US" sz="2200" b="1" dirty="0">
                 <a:solidFill>
                   <a:srgbClr val="7B3A8E"/>
                 </a:solidFill>
@@ -4404,14 +4390,14 @@
               <a:buNone/>
             </a:pPr>
             <a:r>
-              <a:rPr lang="en-US" sz="1800" dirty="0">
+              <a:rPr lang="en-US" sz="2200" dirty="0">
                 <a:solidFill>
                   <a:srgbClr val="141B26"/>
                 </a:solidFill>
               </a:rPr>
               <a:t>Write 5% as a decimal.</a:t>
             </a:r>
-            <a:endParaRPr lang="en-US" sz="1800" dirty="0"/>
+            <a:endParaRPr lang="en-US" sz="2200" dirty="0"/>
           </a:p>
         </p:txBody>
       </p:sp>
@@ -4424,7 +4410,7 @@
         <p:spPr>
           <a:xfrm>
             <a:off x="548640" y="4206240"/>
-            <a:ext cx="10881360" cy="1188720"/>
+            <a:ext cx="9692640" cy="1188720"/>
           </a:xfrm>
           <a:prstGeom prst="rect">
             <a:avLst/>
@@ -4433,16 +4419,14 @@
           <a:ln/>
         </p:spPr>
         <p:txBody>
-          <a:bodyPr wrap="square" lIns="0" tIns="0" rIns="0" bIns="0" rtlCol="0" anchor="t">
-            <a:normAutofit/>
-          </a:bodyPr>
+          <a:bodyPr wrap="square" lIns="0" tIns="0" rIns="0" bIns="0" rtlCol="0" anchor="t"/>
           <a:lstStyle/>
           <a:p>
             <a:pPr indent="0" marL="0">
               <a:buNone/>
             </a:pPr>
             <a:r>
-              <a:rPr lang="en-US" sz="1800" b="1" dirty="0">
+              <a:rPr lang="en-US" sz="2200" b="1" dirty="0">
                 <a:solidFill>
                   <a:srgbClr val="7B3A8E"/>
                 </a:solidFill>
@@ -4453,14 +4437,14 @@
               <a:buNone/>
             </a:pPr>
             <a:r>
-              <a:rPr lang="en-US" sz="1800" dirty="0">
+              <a:rPr lang="en-US" sz="2200" dirty="0">
                 <a:solidFill>
                   <a:srgbClr val="141B26"/>
                 </a:solidFill>
               </a:rPr>
               <a:t>A bag has 20 red, 10 green, 5 blue and 15 yellow beads. Bilal takes one bead. Give the probability that it is blue as a fraction and as a percentage.</a:t>
             </a:r>
-            <a:endParaRPr lang="en-US" sz="1800" dirty="0"/>
+            <a:endParaRPr lang="en-US" sz="2200" dirty="0"/>
           </a:p>
         </p:txBody>
       </p:sp>
@@ -4719,7 +4703,7 @@
         <p:spPr>
           <a:xfrm>
             <a:off x="548640" y="1371600"/>
-            <a:ext cx="10881360" cy="4480560"/>
+            <a:ext cx="10881360" cy="4114800"/>
           </a:xfrm>
           <a:prstGeom prst="rect">
             <a:avLst/>
@@ -4728,81 +4712,79 @@
           <a:ln/>
         </p:spPr>
         <p:txBody>
-          <a:bodyPr wrap="square" lIns="0" tIns="0" rIns="0" bIns="0" rtlCol="0" anchor="t">
-            <a:normAutofit/>
-          </a:bodyPr>
+          <a:bodyPr wrap="square" lIns="0" tIns="0" rIns="0" bIns="0" rtlCol="0" anchor="t"/>
           <a:lstStyle/>
           <a:p>
             <a:pPr marL="342900" indent="-342900">
               <a:spcAft>
-                <a:spcPts val="1000"/>
+                <a:spcPts val="1200"/>
               </a:spcAft>
               <a:buSzPct val="100000"/>
               <a:buChar char="✓"/>
             </a:pPr>
             <a:r>
-              <a:rPr lang="en-US" sz="1700" dirty="0">
+              <a:rPr lang="en-US" sz="2000" dirty="0">
                 <a:solidFill>
                   <a:srgbClr val="141B26"/>
                 </a:solidFill>
               </a:rPr>
               <a:t>Statistics means collecting, analysing and presenting data; a large random sample represents the population.</a:t>
             </a:r>
-            <a:endParaRPr lang="en-US" sz="1700" dirty="0"/>
+            <a:endParaRPr lang="en-US" sz="2000" dirty="0"/>
           </a:p>
           <a:p>
             <a:pPr marL="342900" indent="-342900">
               <a:spcAft>
-                <a:spcPts val="1000"/>
+                <a:spcPts val="1200"/>
               </a:spcAft>
               <a:buSzPct val="100000"/>
               <a:buChar char="✓"/>
             </a:pPr>
             <a:r>
-              <a:rPr lang="en-US" sz="1700" dirty="0">
+              <a:rPr lang="en-US" sz="2000" dirty="0">
                 <a:solidFill>
                   <a:srgbClr val="141B26"/>
                 </a:solidFill>
               </a:rPr>
               <a:t>Probability is the chance of something happening: 0 (impossible) to 1 (certain), written as a percentage, fraction or decimal.</a:t>
             </a:r>
-            <a:endParaRPr lang="en-US" sz="1700" dirty="0"/>
+            <a:endParaRPr lang="en-US" sz="2000" dirty="0"/>
           </a:p>
           <a:p>
             <a:pPr marL="342900" indent="-342900">
               <a:spcAft>
-                <a:spcPts val="1000"/>
+                <a:spcPts val="1200"/>
               </a:spcAft>
               <a:buSzPct val="100000"/>
               <a:buChar char="✓"/>
             </a:pPr>
             <a:r>
-              <a:rPr lang="en-US" sz="1700" dirty="0">
+              <a:rPr lang="en-US" sz="2000" dirty="0">
                 <a:solidFill>
                   <a:srgbClr val="141B26"/>
                 </a:solidFill>
               </a:rPr>
               <a:t>Experimental probability comes from results; theoretical probability from reasoning about the outcomes.</a:t>
             </a:r>
-            <a:endParaRPr lang="en-US" sz="1700" dirty="0"/>
+            <a:endParaRPr lang="en-US" sz="2000" dirty="0"/>
           </a:p>
           <a:p>
             <a:pPr marL="342900" indent="-342900">
               <a:spcAft>
-                <a:spcPts val="1000"/>
+                <a:spcPts val="1200"/>
               </a:spcAft>
               <a:buSzPct val="100000"/>
               <a:buChar char="✓"/>
             </a:pPr>
             <a:r>
-              <a:rPr lang="en-US" sz="1700" dirty="0">
+              <a:rPr lang="en-US" sz="2000" dirty="0">
                 <a:solidFill>
                   <a:srgbClr val="141B26"/>
                 </a:solidFill>
               </a:rPr>
               <a:t>In a normal distribution the mean, median and mode are the same, and values near the middle are most likely.</a:t>
             </a:r>
-            <a:endParaRPr lang="en-US" sz="1700" dirty="0"/>
+            <a:endParaRPr lang="en-US" sz="2000" dirty="0"/>
           </a:p>
         </p:txBody>
       </p:sp>
@@ -4831,7 +4813,7 @@
               <a:buNone/>
             </a:pPr>
             <a:r>
-              <a:rPr lang="en-US" sz="1300" b="1" dirty="0">
+              <a:rPr lang="en-US" sz="1500" b="1" dirty="0">
                 <a:solidFill>
                   <a:srgbClr val="7B3A8E"/>
                 </a:solidFill>
@@ -4842,14 +4824,14 @@
               <a:buNone/>
             </a:pPr>
             <a:r>
-              <a:rPr lang="en-US" sz="1300" dirty="0">
+              <a:rPr lang="en-US" sz="1500" dirty="0">
                 <a:solidFill>
                   <a:srgbClr val="141B26"/>
                 </a:solidFill>
               </a:rPr>
               <a:t>DNA: how the structure of DNA was discovered, and how DNA, chromosomes and genes fit together.</a:t>
             </a:r>
-            <a:endParaRPr lang="en-US" sz="1300" dirty="0"/>
+            <a:endParaRPr lang="en-US" sz="1500" dirty="0"/>
           </a:p>
         </p:txBody>
       </p:sp>
@@ -5117,77 +5099,75 @@
           <a:ln/>
         </p:spPr>
         <p:txBody>
-          <a:bodyPr wrap="square" lIns="0" tIns="0" rIns="0" bIns="0" rtlCol="0" anchor="t">
-            <a:normAutofit/>
-          </a:bodyPr>
+          <a:bodyPr wrap="square" lIns="0" tIns="0" rIns="0" bIns="0" rtlCol="0" anchor="t"/>
           <a:lstStyle/>
           <a:p>
             <a:pPr indent="0" marL="0">
               <a:spcAft>
-                <a:spcPts val="1000"/>
+                <a:spcPts val="1200"/>
               </a:spcAft>
               <a:buNone/>
             </a:pPr>
             <a:r>
-              <a:rPr lang="en-US" sz="2000" dirty="0">
+              <a:rPr lang="en-US" sz="2400" dirty="0">
                 <a:solidFill>
                   <a:srgbClr val="141B26"/>
                 </a:solidFill>
               </a:rPr>
               <a:t>A weather app says there is a 76% chance of rain between 11:00 and 12:00 tomorrow.</a:t>
             </a:r>
-            <a:endParaRPr lang="en-US" sz="2000" dirty="0"/>
+            <a:endParaRPr lang="en-US" sz="2400" dirty="0"/>
           </a:p>
           <a:p>
             <a:pPr indent="0" marL="0">
               <a:spcAft>
-                <a:spcPts val="1000"/>
+                <a:spcPts val="1200"/>
               </a:spcAft>
               <a:buNone/>
             </a:pPr>
             <a:r>
-              <a:rPr lang="en-US" sz="2000" dirty="0">
+              <a:rPr lang="en-US" sz="2400" dirty="0">
                 <a:solidFill>
                   <a:srgbClr val="141B26"/>
                 </a:solidFill>
               </a:rPr>
               <a:t>1. What do you think 76% means here?</a:t>
             </a:r>
-            <a:endParaRPr lang="en-US" sz="2000" dirty="0"/>
+            <a:endParaRPr lang="en-US" sz="2400" dirty="0"/>
           </a:p>
           <a:p>
             <a:pPr indent="0" marL="0">
               <a:spcAft>
-                <a:spcPts val="1000"/>
+                <a:spcPts val="1200"/>
               </a:spcAft>
               <a:buNone/>
             </a:pPr>
             <a:r>
-              <a:rPr lang="en-US" sz="2000" dirty="0">
+              <a:rPr lang="en-US" sz="2400" dirty="0">
                 <a:solidFill>
                   <a:srgbClr val="141B26"/>
                 </a:solidFill>
               </a:rPr>
               <a:t>2. Write 76% as a fraction and as a decimal.</a:t>
             </a:r>
-            <a:endParaRPr lang="en-US" sz="2000" dirty="0"/>
+            <a:endParaRPr lang="en-US" sz="2400" dirty="0"/>
           </a:p>
           <a:p>
             <a:pPr indent="0" marL="0">
               <a:spcAft>
-                <a:spcPts val="1000"/>
+                <a:spcPts val="1200"/>
               </a:spcAft>
               <a:buNone/>
             </a:pPr>
             <a:r>
-              <a:rPr lang="en-US" sz="2000" dirty="0">
+              <a:rPr lang="en-US" sz="2400" dirty="0">
                 <a:solidFill>
                   <a:srgbClr val="141B26"/>
                 </a:solidFill>
               </a:rPr>
               <a:t>3. Is rain certain? How do you know?</a:t>
             </a:r>
-            <a:endParaRPr lang="en-US" sz="2000" dirty="0"/>
+            <a:endParaRPr lang="en-US" sz="2400" dirty="0"/>
           </a:p>
         </p:txBody>
       </p:sp>
@@ -5370,8 +5350,8 @@
         </p:nvSpPr>
         <p:spPr>
           <a:xfrm>
-            <a:off x="548640" y="1325880"/>
-            <a:ext cx="5669280" cy="457200"/>
+            <a:off x="548640" y="1280160"/>
+            <a:ext cx="5486400" cy="411480"/>
           </a:xfrm>
           <a:prstGeom prst="rect">
             <a:avLst/>
@@ -5387,14 +5367,14 @@
               <a:buNone/>
             </a:pPr>
             <a:r>
-              <a:rPr lang="en-US" sz="2000" b="1" dirty="0">
+              <a:rPr lang="en-US" sz="2200" b="1" dirty="0">
                 <a:solidFill>
                   <a:srgbClr val="7B3A8E"/>
                 </a:solidFill>
               </a:rPr>
               <a:t>Today I can ...</a:t>
             </a:r>
-            <a:endParaRPr lang="en-US" sz="2000" dirty="0"/>
+            <a:endParaRPr lang="en-US" sz="2200" dirty="0"/>
           </a:p>
         </p:txBody>
       </p:sp>
@@ -5406,8 +5386,8 @@
         </p:nvSpPr>
         <p:spPr>
           <a:xfrm>
-            <a:off x="594360" y="1947672"/>
-            <a:ext cx="292608" cy="292608"/>
+            <a:off x="594360" y="1810512"/>
+            <a:ext cx="310896" cy="310896"/>
           </a:xfrm>
           <a:prstGeom prst="rect">
             <a:avLst/>
@@ -5431,8 +5411,8 @@
         </p:nvSpPr>
         <p:spPr>
           <a:xfrm>
-            <a:off x="1051560" y="1874520"/>
-            <a:ext cx="5120640" cy="868680"/>
+            <a:off x="1097280" y="1737360"/>
+            <a:ext cx="10332720" cy="868680"/>
           </a:xfrm>
           <a:prstGeom prst="rect">
             <a:avLst/>
@@ -5441,23 +5421,21 @@
           <a:ln/>
         </p:spPr>
         <p:txBody>
-          <a:bodyPr wrap="square" lIns="0" tIns="0" rIns="0" bIns="0" rtlCol="0" anchor="t">
-            <a:normAutofit/>
-          </a:bodyPr>
+          <a:bodyPr wrap="square" lIns="0" tIns="0" rIns="0" bIns="0" rtlCol="0" anchor="t"/>
           <a:lstStyle/>
           <a:p>
             <a:pPr indent="0" marL="0">
               <a:buNone/>
             </a:pPr>
             <a:r>
-              <a:rPr lang="en-US" sz="1600" dirty="0">
+              <a:rPr lang="en-US" sz="2000" dirty="0">
                 <a:solidFill>
                   <a:srgbClr val="141B26"/>
                 </a:solidFill>
               </a:rPr>
               <a:t>I can explain what probability is and write a probability as a percentage, a fraction and a decimal.</a:t>
             </a:r>
-            <a:endParaRPr lang="en-US" sz="1600" dirty="0"/>
+            <a:endParaRPr lang="en-US" sz="2000" dirty="0"/>
           </a:p>
         </p:txBody>
       </p:sp>
@@ -5469,8 +5447,8 @@
         </p:nvSpPr>
         <p:spPr>
           <a:xfrm>
-            <a:off x="594360" y="2907792"/>
-            <a:ext cx="292608" cy="292608"/>
+            <a:off x="594360" y="2679192"/>
+            <a:ext cx="310896" cy="310896"/>
           </a:xfrm>
           <a:prstGeom prst="rect">
             <a:avLst/>
@@ -5494,8 +5472,8 @@
         </p:nvSpPr>
         <p:spPr>
           <a:xfrm>
-            <a:off x="1051560" y="2834640"/>
-            <a:ext cx="5120640" cy="868680"/>
+            <a:off x="1097280" y="2606040"/>
+            <a:ext cx="10332720" cy="868680"/>
           </a:xfrm>
           <a:prstGeom prst="rect">
             <a:avLst/>
@@ -5504,23 +5482,21 @@
           <a:ln/>
         </p:spPr>
         <p:txBody>
-          <a:bodyPr wrap="square" lIns="0" tIns="0" rIns="0" bIns="0" rtlCol="0" anchor="t">
-            <a:normAutofit/>
-          </a:bodyPr>
+          <a:bodyPr wrap="square" lIns="0" tIns="0" rIns="0" bIns="0" rtlCol="0" anchor="t"/>
           <a:lstStyle/>
           <a:p>
             <a:pPr indent="0" marL="0">
               <a:buNone/>
             </a:pPr>
             <a:r>
-              <a:rPr lang="en-US" sz="1600" dirty="0">
+              <a:rPr lang="en-US" sz="2000" dirty="0">
                 <a:solidFill>
                   <a:srgbClr val="141B26"/>
                 </a:solidFill>
               </a:rPr>
               <a:t>I can calculate an experimental probability from results and compare it with a theoretical probability.</a:t>
             </a:r>
-            <a:endParaRPr lang="en-US" sz="1600" dirty="0"/>
+            <a:endParaRPr lang="en-US" sz="2000" dirty="0"/>
           </a:p>
         </p:txBody>
       </p:sp>
@@ -5532,8 +5508,8 @@
         </p:nvSpPr>
         <p:spPr>
           <a:xfrm>
-            <a:off x="6583680" y="1325880"/>
-            <a:ext cx="5029200" cy="457200"/>
+            <a:off x="548640" y="3611880"/>
+            <a:ext cx="5486400" cy="411480"/>
           </a:xfrm>
           <a:prstGeom prst="rect">
             <a:avLst/>
@@ -5549,14 +5525,14 @@
               <a:buNone/>
             </a:pPr>
             <a:r>
-              <a:rPr lang="en-US" sz="2000" b="1" dirty="0">
+              <a:rPr lang="en-US" sz="2200" b="1" dirty="0">
                 <a:solidFill>
                   <a:srgbClr val="7B3A8E"/>
                 </a:solidFill>
               </a:rPr>
               <a:t>Key words today</a:t>
             </a:r>
-            <a:endParaRPr lang="en-US" sz="2000" dirty="0"/>
+            <a:endParaRPr lang="en-US" sz="2200" dirty="0"/>
           </a:p>
         </p:txBody>
       </p:sp>
@@ -5568,8 +5544,8 @@
         </p:nvSpPr>
         <p:spPr>
           <a:xfrm>
-            <a:off x="6583680" y="1874520"/>
-            <a:ext cx="5029200" cy="4023360"/>
+            <a:off x="548640" y="4069080"/>
+            <a:ext cx="3515258" cy="1920240"/>
           </a:xfrm>
           <a:prstGeom prst="rect">
             <a:avLst/>
@@ -5578,350 +5554,285 @@
           <a:ln/>
         </p:spPr>
         <p:txBody>
-          <a:bodyPr wrap="square" lIns="0" tIns="0" rIns="0" bIns="0" rtlCol="0" anchor="t">
-            <a:normAutofit/>
-          </a:bodyPr>
+          <a:bodyPr wrap="square" lIns="0" tIns="0" rIns="0" bIns="0" rtlCol="0" anchor="t"/>
+          <a:lstStyle/>
+          <a:p>
+            <a:pPr marL="304800" indent="-304800">
+              <a:spcAft>
+                <a:spcPts val="600"/>
+              </a:spcAft>
+              <a:buSzPct val="100000"/>
+              <a:buChar char="•"/>
+            </a:pPr>
+            <a:r>
+              <a:rPr lang="en-US" sz="2100" b="1" dirty="0">
+                <a:solidFill>
+                  <a:srgbClr val="0F2A5F"/>
+                </a:solidFill>
+              </a:rPr>
+              <a:t>statistics</a:t>
+            </a:r>
+            <a:endParaRPr lang="en-US" sz="2100" dirty="0"/>
+          </a:p>
+          <a:p>
+            <a:pPr marL="304800" indent="-304800">
+              <a:spcAft>
+                <a:spcPts val="600"/>
+              </a:spcAft>
+              <a:buSzPct val="100000"/>
+              <a:buChar char="•"/>
+            </a:pPr>
+            <a:r>
+              <a:rPr lang="en-US" sz="2100" b="1" dirty="0">
+                <a:solidFill>
+                  <a:srgbClr val="0F2A5F"/>
+                </a:solidFill>
+              </a:rPr>
+              <a:t>sample</a:t>
+            </a:r>
+            <a:endParaRPr lang="en-US" sz="2100" dirty="0"/>
+          </a:p>
+          <a:p>
+            <a:pPr marL="304800" indent="-304800">
+              <a:spcAft>
+                <a:spcPts val="600"/>
+              </a:spcAft>
+              <a:buSzPct val="100000"/>
+              <a:buChar char="•"/>
+            </a:pPr>
+            <a:r>
+              <a:rPr lang="en-US" sz="2100" b="1" dirty="0">
+                <a:solidFill>
+                  <a:srgbClr val="0F2A5F"/>
+                </a:solidFill>
+              </a:rPr>
+              <a:t>mean</a:t>
+            </a:r>
+            <a:endParaRPr lang="en-US" sz="2100" dirty="0"/>
+          </a:p>
+          <a:p>
+            <a:pPr marL="304800" indent="-304800">
+              <a:spcAft>
+                <a:spcPts val="600"/>
+              </a:spcAft>
+              <a:buSzPct val="100000"/>
+              <a:buChar char="•"/>
+            </a:pPr>
+            <a:r>
+              <a:rPr lang="en-US" sz="2100" b="1" dirty="0">
+                <a:solidFill>
+                  <a:srgbClr val="0F2A5F"/>
+                </a:solidFill>
+              </a:rPr>
+              <a:t>median</a:t>
+            </a:r>
+            <a:endParaRPr lang="en-US" sz="2100" dirty="0"/>
+          </a:p>
+        </p:txBody>
+      </p:sp>
+      <p:sp>
+        <p:nvSpPr>
+          <p:cNvPr id="12" name="Text 10"/>
+          <p:cNvSpPr txBox="1"/>
+          <p:nvPr/>
+        </p:nvSpPr>
+        <p:spPr>
+          <a:xfrm>
+            <a:off x="4338218" y="4069080"/>
+            <a:ext cx="3515258" cy="1920240"/>
+          </a:xfrm>
+          <a:prstGeom prst="rect">
+            <a:avLst/>
+          </a:prstGeom>
+          <a:noFill/>
+          <a:ln/>
+        </p:spPr>
+        <p:txBody>
+          <a:bodyPr wrap="square" lIns="0" tIns="0" rIns="0" bIns="0" rtlCol="0" anchor="t"/>
+          <a:lstStyle/>
+          <a:p>
+            <a:pPr marL="304800" indent="-304800">
+              <a:spcAft>
+                <a:spcPts val="600"/>
+              </a:spcAft>
+              <a:buSzPct val="100000"/>
+              <a:buChar char="•"/>
+            </a:pPr>
+            <a:r>
+              <a:rPr lang="en-US" sz="2100" b="1" dirty="0">
+                <a:solidFill>
+                  <a:srgbClr val="0F2A5F"/>
+                </a:solidFill>
+              </a:rPr>
+              <a:t>mode</a:t>
+            </a:r>
+            <a:endParaRPr lang="en-US" sz="2100" dirty="0"/>
+          </a:p>
+          <a:p>
+            <a:pPr marL="304800" indent="-304800">
+              <a:spcAft>
+                <a:spcPts val="600"/>
+              </a:spcAft>
+              <a:buSzPct val="100000"/>
+              <a:buChar char="•"/>
+            </a:pPr>
+            <a:r>
+              <a:rPr lang="en-US" sz="2100" b="1" dirty="0">
+                <a:solidFill>
+                  <a:srgbClr val="0F2A5F"/>
+                </a:solidFill>
+              </a:rPr>
+              <a:t>probability</a:t>
+            </a:r>
+            <a:endParaRPr lang="en-US" sz="2100" dirty="0"/>
+          </a:p>
+          <a:p>
+            <a:pPr marL="304800" indent="-304800">
+              <a:spcAft>
+                <a:spcPts val="600"/>
+              </a:spcAft>
+              <a:buSzPct val="100000"/>
+              <a:buChar char="•"/>
+            </a:pPr>
+            <a:r>
+              <a:rPr lang="en-US" sz="2100" b="1" dirty="0">
+                <a:solidFill>
+                  <a:srgbClr val="0F2A5F"/>
+                </a:solidFill>
+              </a:rPr>
+              <a:t>percentage</a:t>
+            </a:r>
+            <a:endParaRPr lang="en-US" sz="2100" dirty="0"/>
+          </a:p>
+          <a:p>
+            <a:pPr marL="304800" indent="-304800">
+              <a:spcAft>
+                <a:spcPts val="600"/>
+              </a:spcAft>
+              <a:buSzPct val="100000"/>
+              <a:buChar char="•"/>
+            </a:pPr>
+            <a:r>
+              <a:rPr lang="en-US" sz="2100" b="1" dirty="0">
+                <a:solidFill>
+                  <a:srgbClr val="0F2A5F"/>
+                </a:solidFill>
+              </a:rPr>
+              <a:t>fraction</a:t>
+            </a:r>
+            <a:endParaRPr lang="en-US" sz="2100" dirty="0"/>
+          </a:p>
+        </p:txBody>
+      </p:sp>
+      <p:sp>
+        <p:nvSpPr>
+          <p:cNvPr id="13" name="Text 11"/>
+          <p:cNvSpPr txBox="1"/>
+          <p:nvPr/>
+        </p:nvSpPr>
+        <p:spPr>
+          <a:xfrm>
+            <a:off x="8127797" y="4069080"/>
+            <a:ext cx="3515258" cy="1920240"/>
+          </a:xfrm>
+          <a:prstGeom prst="rect">
+            <a:avLst/>
+          </a:prstGeom>
+          <a:noFill/>
+          <a:ln/>
+        </p:spPr>
+        <p:txBody>
+          <a:bodyPr wrap="square" lIns="0" tIns="0" rIns="0" bIns="0" rtlCol="0" anchor="t"/>
+          <a:lstStyle/>
+          <a:p>
+            <a:pPr marL="304800" indent="-304800">
+              <a:spcAft>
+                <a:spcPts val="600"/>
+              </a:spcAft>
+              <a:buSzPct val="100000"/>
+              <a:buChar char="•"/>
+            </a:pPr>
+            <a:r>
+              <a:rPr lang="en-US" sz="2200" b="1" dirty="0">
+                <a:solidFill>
+                  <a:srgbClr val="0F2A5F"/>
+                </a:solidFill>
+              </a:rPr>
+              <a:t>decimal</a:t>
+            </a:r>
+            <a:endParaRPr lang="en-US" sz="2200" dirty="0"/>
+          </a:p>
+          <a:p>
+            <a:pPr marL="304800" indent="-304800">
+              <a:spcAft>
+                <a:spcPts val="600"/>
+              </a:spcAft>
+              <a:buSzPct val="100000"/>
+              <a:buChar char="•"/>
+            </a:pPr>
+            <a:r>
+              <a:rPr lang="en-US" sz="2200" b="1" dirty="0">
+                <a:solidFill>
+                  <a:srgbClr val="0F2A5F"/>
+                </a:solidFill>
+              </a:rPr>
+              <a:t>experimental probability</a:t>
+            </a:r>
+            <a:endParaRPr lang="en-US" sz="2200" dirty="0"/>
+          </a:p>
+          <a:p>
+            <a:pPr marL="304800" indent="-304800">
+              <a:spcAft>
+                <a:spcPts val="600"/>
+              </a:spcAft>
+              <a:buSzPct val="100000"/>
+              <a:buChar char="•"/>
+            </a:pPr>
+            <a:r>
+              <a:rPr lang="en-US" sz="2200" b="1" dirty="0">
+                <a:solidFill>
+                  <a:srgbClr val="0F2A5F"/>
+                </a:solidFill>
+              </a:rPr>
+              <a:t>theoretical probability</a:t>
+            </a:r>
+            <a:endParaRPr lang="en-US" sz="2200" dirty="0"/>
+          </a:p>
+        </p:txBody>
+      </p:sp>
+      <p:sp>
+        <p:nvSpPr>
+          <p:cNvPr id="14" name="Text 12"/>
+          <p:cNvSpPr txBox="1"/>
+          <p:nvPr/>
+        </p:nvSpPr>
+        <p:spPr>
+          <a:xfrm>
+            <a:off x="548640" y="6035040"/>
+            <a:ext cx="10881360" cy="320040"/>
+          </a:xfrm>
+          <a:prstGeom prst="rect">
+            <a:avLst/>
+          </a:prstGeom>
+          <a:noFill/>
+          <a:ln/>
+        </p:spPr>
+        <p:txBody>
+          <a:bodyPr wrap="square" lIns="0" tIns="0" rIns="0" bIns="0" rtlCol="0" anchor="ctr"/>
           <a:lstStyle/>
           <a:p>
             <a:pPr indent="0" marL="0">
-              <a:spcAft>
-                <a:spcPts val="500"/>
-              </a:spcAft>
-              <a:buNone/>
-            </a:pPr>
-            <a:r>
-              <a:rPr lang="en-US" sz="1300" b="1" dirty="0">
-                <a:solidFill>
-                  <a:srgbClr val="0F2A5F"/>
-                </a:solidFill>
-              </a:rPr>
-              <a:t>statistics</a:t>
-            </a:r>
-            <a:pPr indent="0" marL="0">
-              <a:spcAft>
-                <a:spcPts val="500"/>
-              </a:spcAft>
-              <a:buNone/>
-            </a:pPr>
-            <a:r>
-              <a:rPr lang="en-US" sz="1300" dirty="0">
-                <a:solidFill>
-                  <a:srgbClr val="141B26"/>
-                </a:solidFill>
-              </a:rPr>
-              <a:t>  collecting, analysing and presenting data</a:t>
-            </a:r>
-            <a:endParaRPr lang="en-US" sz="1300" dirty="0"/>
-          </a:p>
-          <a:p>
-            <a:pPr indent="0" marL="0">
-              <a:spcAft>
-                <a:spcPts val="500"/>
-              </a:spcAft>
-              <a:buNone/>
-            </a:pPr>
-            <a:r>
-              <a:rPr lang="en-US" sz="1300" b="1" dirty="0">
-                <a:solidFill>
-                  <a:srgbClr val="0F2A5F"/>
-                </a:solidFill>
-              </a:rPr>
-              <a:t>sample</a:t>
-            </a:r>
-            <a:pPr indent="0" marL="0">
-              <a:spcAft>
-                <a:spcPts val="500"/>
-              </a:spcAft>
-              <a:buNone/>
-            </a:pPr>
-            <a:r>
-              <a:rPr lang="en-US" sz="1300" dirty="0">
-                <a:solidFill>
-                  <a:srgbClr val="141B26"/>
-                </a:solidFill>
-              </a:rPr>
-              <a:t>  a small part of a group that is measured to estimate the whole group</a:t>
-            </a:r>
-            <a:endParaRPr lang="en-US" sz="1300" dirty="0"/>
-          </a:p>
-          <a:p>
-            <a:pPr indent="0" marL="0">
-              <a:spcAft>
-                <a:spcPts val="500"/>
-              </a:spcAft>
-              <a:buNone/>
-            </a:pPr>
-            <a:r>
-              <a:rPr lang="en-US" sz="1300" b="1" dirty="0">
-                <a:solidFill>
-                  <a:srgbClr val="0F2A5F"/>
-                </a:solidFill>
-              </a:rPr>
-              <a:t>mean</a:t>
-            </a:r>
-            <a:pPr indent="0" marL="0">
-              <a:spcAft>
-                <a:spcPts val="500"/>
-              </a:spcAft>
-              <a:buNone/>
-            </a:pPr>
-            <a:r>
-              <a:rPr lang="en-US" sz="1300" dirty="0">
-                <a:solidFill>
-                  <a:srgbClr val="141B26"/>
-                </a:solidFill>
-              </a:rPr>
-              <a:t>  the sum of the values divided by the number of values</a:t>
-            </a:r>
-            <a:endParaRPr lang="en-US" sz="1300" dirty="0"/>
-          </a:p>
-          <a:p>
-            <a:pPr indent="0" marL="0">
-              <a:spcAft>
-                <a:spcPts val="500"/>
-              </a:spcAft>
-              <a:buNone/>
-            </a:pPr>
-            <a:r>
-              <a:rPr lang="en-US" sz="1300" b="1" dirty="0">
-                <a:solidFill>
-                  <a:srgbClr val="0F2A5F"/>
-                </a:solidFill>
-              </a:rPr>
-              <a:t>median</a:t>
-            </a:r>
-            <a:pPr indent="0" marL="0">
-              <a:spcAft>
-                <a:spcPts val="500"/>
-              </a:spcAft>
-              <a:buNone/>
-            </a:pPr>
-            <a:r>
-              <a:rPr lang="en-US" sz="1300" dirty="0">
-                <a:solidFill>
-                  <a:srgbClr val="141B26"/>
-                </a:solidFill>
-              </a:rPr>
-              <a:t>  the middle value when the values are in order</a:t>
-            </a:r>
-            <a:endParaRPr lang="en-US" sz="1300" dirty="0"/>
-          </a:p>
-          <a:p>
-            <a:pPr indent="0" marL="0">
-              <a:spcAft>
-                <a:spcPts val="500"/>
-              </a:spcAft>
-              <a:buNone/>
-            </a:pPr>
-            <a:r>
-              <a:rPr lang="en-US" sz="1300" b="1" dirty="0">
-                <a:solidFill>
-                  <a:srgbClr val="0F2A5F"/>
-                </a:solidFill>
-              </a:rPr>
-              <a:t>mode</a:t>
-            </a:r>
-            <a:pPr indent="0" marL="0">
-              <a:spcAft>
-                <a:spcPts val="500"/>
-              </a:spcAft>
-              <a:buNone/>
-            </a:pPr>
-            <a:r>
-              <a:rPr lang="en-US" sz="1300" dirty="0">
-                <a:solidFill>
-                  <a:srgbClr val="141B26"/>
-                </a:solidFill>
-              </a:rPr>
-              <a:t>  the most common value in a set</a:t>
-            </a:r>
-            <a:endParaRPr lang="en-US" sz="1300" dirty="0"/>
-          </a:p>
-          <a:p>
-            <a:pPr indent="0" marL="0">
-              <a:spcAft>
-                <a:spcPts val="500"/>
-              </a:spcAft>
-              <a:buNone/>
-            </a:pPr>
-            <a:r>
-              <a:rPr lang="en-US" sz="1300" b="1" dirty="0">
-                <a:solidFill>
-                  <a:srgbClr val="0F2A5F"/>
-                </a:solidFill>
-              </a:rPr>
-              <a:t>probability</a:t>
-            </a:r>
-            <a:pPr indent="0" marL="0">
-              <a:spcAft>
-                <a:spcPts val="500"/>
-              </a:spcAft>
-              <a:buNone/>
-            </a:pPr>
-            <a:r>
-              <a:rPr lang="en-US" sz="1300" dirty="0">
-                <a:solidFill>
-                  <a:srgbClr val="141B26"/>
-                </a:solidFill>
-              </a:rPr>
-              <a:t>  the chance of something happening</a:t>
-            </a:r>
-            <a:endParaRPr lang="en-US" sz="1300" dirty="0"/>
-          </a:p>
-          <a:p>
-            <a:pPr indent="0" marL="0">
-              <a:spcAft>
-                <a:spcPts val="500"/>
-              </a:spcAft>
-              <a:buNone/>
-            </a:pPr>
-            <a:r>
-              <a:rPr lang="en-US" sz="1300" b="1" dirty="0">
-                <a:solidFill>
-                  <a:srgbClr val="0F2A5F"/>
-                </a:solidFill>
-              </a:rPr>
-              <a:t>percentage</a:t>
-            </a:r>
-            <a:pPr indent="0" marL="0">
-              <a:spcAft>
-                <a:spcPts val="500"/>
-              </a:spcAft>
-              <a:buNone/>
-            </a:pPr>
-            <a:r>
-              <a:rPr lang="en-US" sz="1300" dirty="0">
-                <a:solidFill>
-                  <a:srgbClr val="141B26"/>
-                </a:solidFill>
-              </a:rPr>
-              <a:t>  a number out of 100, shown with the % sign</a:t>
-            </a:r>
-            <a:endParaRPr lang="en-US" sz="1300" dirty="0"/>
-          </a:p>
-          <a:p>
-            <a:pPr indent="0" marL="0">
-              <a:spcAft>
-                <a:spcPts val="500"/>
-              </a:spcAft>
-              <a:buNone/>
-            </a:pPr>
-            <a:r>
-              <a:rPr lang="en-US" sz="1300" b="1" dirty="0">
-                <a:solidFill>
-                  <a:srgbClr val="0F2A5F"/>
-                </a:solidFill>
-              </a:rPr>
-              <a:t>fraction</a:t>
-            </a:r>
-            <a:pPr indent="0" marL="0">
-              <a:spcAft>
-                <a:spcPts val="500"/>
-              </a:spcAft>
-              <a:buNone/>
-            </a:pPr>
-            <a:r>
-              <a:rPr lang="en-US" sz="1300" dirty="0">
-                <a:solidFill>
-                  <a:srgbClr val="141B26"/>
-                </a:solidFill>
-              </a:rPr>
-              <a:t>  a part of a whole, written as one number over another, e.g. 1/4</a:t>
-            </a:r>
-            <a:endParaRPr lang="en-US" sz="1300" dirty="0"/>
-          </a:p>
-          <a:p>
-            <a:pPr indent="0" marL="0">
-              <a:spcAft>
-                <a:spcPts val="500"/>
-              </a:spcAft>
-              <a:buNone/>
-            </a:pPr>
-            <a:r>
-              <a:rPr lang="en-US" sz="1300" b="1" dirty="0">
-                <a:solidFill>
-                  <a:srgbClr val="0F2A5F"/>
-                </a:solidFill>
-              </a:rPr>
-              <a:t>decimal</a:t>
-            </a:r>
-            <a:pPr indent="0" marL="0">
-              <a:spcAft>
-                <a:spcPts val="500"/>
-              </a:spcAft>
-              <a:buNone/>
-            </a:pPr>
-            <a:r>
-              <a:rPr lang="en-US" sz="1300" dirty="0">
-                <a:solidFill>
-                  <a:srgbClr val="141B26"/>
-                </a:solidFill>
-              </a:rPr>
-              <a:t>  a number written with a decimal point, e.g. 0.25</a:t>
-            </a:r>
-            <a:endParaRPr lang="en-US" sz="1300" dirty="0"/>
-          </a:p>
-          <a:p>
-            <a:pPr indent="0" marL="0">
-              <a:spcAft>
-                <a:spcPts val="500"/>
-              </a:spcAft>
-              <a:buNone/>
-            </a:pPr>
-            <a:r>
-              <a:rPr lang="en-US" sz="1300" b="1" dirty="0">
-                <a:solidFill>
-                  <a:srgbClr val="0F2A5F"/>
-                </a:solidFill>
-              </a:rPr>
-              <a:t>experimental probability</a:t>
-            </a:r>
-            <a:pPr indent="0" marL="0">
-              <a:spcAft>
-                <a:spcPts val="500"/>
-              </a:spcAft>
-              <a:buNone/>
-            </a:pPr>
-            <a:r>
-              <a:rPr lang="en-US" sz="1300" dirty="0">
-                <a:solidFill>
-                  <a:srgbClr val="141B26"/>
-                </a:solidFill>
-              </a:rPr>
-              <a:t>  a probability worked out from the results of an experiment</a:t>
-            </a:r>
-            <a:endParaRPr lang="en-US" sz="1300" dirty="0"/>
-          </a:p>
-          <a:p>
-            <a:pPr indent="0" marL="0">
-              <a:spcAft>
-                <a:spcPts val="500"/>
-              </a:spcAft>
-              <a:buNone/>
-            </a:pPr>
-            <a:r>
-              <a:rPr lang="en-US" sz="1300" b="1" dirty="0">
-                <a:solidFill>
-                  <a:srgbClr val="0F2A5F"/>
-                </a:solidFill>
-              </a:rPr>
-              <a:t>theoretical probability</a:t>
-            </a:r>
-            <a:pPr indent="0" marL="0">
-              <a:spcAft>
-                <a:spcPts val="500"/>
-              </a:spcAft>
-              <a:buNone/>
-            </a:pPr>
-            <a:r>
-              <a:rPr lang="en-US" sz="1300" dirty="0">
-                <a:solidFill>
-                  <a:srgbClr val="141B26"/>
-                </a:solidFill>
-              </a:rPr>
-              <a:t>  a probability worked out by reasoning about all the possible outcomes</a:t>
-            </a:r>
-            <a:endParaRPr lang="en-US" sz="1300" dirty="0"/>
+              <a:buNone/>
+            </a:pPr>
+            <a:r>
+              <a:rPr lang="en-US" sz="1400" i="1" dirty="0">
+                <a:solidFill>
+                  <a:srgbClr val="5B6574"/>
+                </a:solidFill>
+              </a:rPr>
+              <a:t>Meanings are in the key words box on your worksheet.</a:t>
+            </a:r>
+            <a:endParaRPr lang="en-US" sz="1400" dirty="0"/>
           </a:p>
         </p:txBody>
       </p:sp>
@@ -6105,7 +6016,7 @@
         <p:spPr>
           <a:xfrm>
             <a:off x="548640" y="1371600"/>
-            <a:ext cx="10881360" cy="2377440"/>
+            <a:ext cx="10881360" cy="2651760"/>
           </a:xfrm>
           <a:prstGeom prst="rect">
             <a:avLst/>
@@ -6114,23 +6025,21 @@
           <a:ln/>
         </p:spPr>
         <p:txBody>
-          <a:bodyPr wrap="square" lIns="0" tIns="0" rIns="0" bIns="0" rtlCol="0" anchor="t">
-            <a:normAutofit/>
-          </a:bodyPr>
+          <a:bodyPr wrap="square" lIns="0" tIns="0" rIns="0" bIns="0" rtlCol="0" anchor="t"/>
           <a:lstStyle/>
           <a:p>
             <a:pPr indent="0" marL="0">
               <a:buNone/>
             </a:pPr>
             <a:r>
-              <a:rPr lang="en-US" sz="2800" b="1" dirty="0">
+              <a:rPr lang="en-US" sz="3000" b="1" dirty="0">
                 <a:solidFill>
                   <a:srgbClr val="0F2A5F"/>
                 </a:solidFill>
               </a:rPr>
               <a:t>A company asked 113,867 people in Japan how interested they were in dinosaurs. 25% said 'interested' and 10% said 'uninterested'. Why ask so many people, and what could the company do with the answers?</a:t>
             </a:r>
-            <a:endParaRPr lang="en-US" sz="2800" dirty="0"/>
+            <a:endParaRPr lang="en-US" sz="3000" dirty="0"/>
           </a:p>
         </p:txBody>
       </p:sp>
@@ -6142,8 +6051,8 @@
         </p:nvSpPr>
         <p:spPr>
           <a:xfrm>
-            <a:off x="548640" y="3794760"/>
-            <a:ext cx="10881360" cy="2103120"/>
+            <a:off x="548640" y="4114800"/>
+            <a:ext cx="10881360" cy="1828800"/>
           </a:xfrm>
           <a:prstGeom prst="rect">
             <a:avLst/>
@@ -6152,9 +6061,7 @@
           <a:ln/>
         </p:spPr>
         <p:txBody>
-          <a:bodyPr wrap="square" lIns="0" tIns="0" rIns="0" bIns="0" rtlCol="0" anchor="t">
-            <a:normAutofit/>
-          </a:bodyPr>
+          <a:bodyPr wrap="square" lIns="0" tIns="0" rIns="0" bIns="0" rtlCol="0" anchor="t"/>
           <a:lstStyle/>
           <a:p>
             <a:pPr indent="0" marL="0">
@@ -6164,14 +6071,14 @@
               <a:buNone/>
             </a:pPr>
             <a:r>
-              <a:rPr lang="en-US" sz="1600" dirty="0">
+              <a:rPr lang="en-US" sz="2000" dirty="0">
                 <a:solidFill>
                   <a:srgbClr val="141B26"/>
                 </a:solidFill>
               </a:rPr>
               <a:t>Talk to a partner. Would 20 people have been enough?</a:t>
             </a:r>
-            <a:endParaRPr lang="en-US" sz="1600" dirty="0"/>
+            <a:endParaRPr lang="en-US" sz="2000" dirty="0"/>
           </a:p>
         </p:txBody>
       </p:sp>
@@ -6354,8 +6261,8 @@
         </p:nvSpPr>
         <p:spPr>
           <a:xfrm>
-            <a:off x="548640" y="6053328"/>
-            <a:ext cx="9601200" cy="292608"/>
+            <a:off x="548640" y="6035040"/>
+            <a:ext cx="9601200" cy="310896"/>
           </a:xfrm>
           <a:prstGeom prst="rect">
             <a:avLst/>
@@ -6371,7 +6278,7 @@
               <a:buNone/>
             </a:pPr>
             <a:r>
-              <a:rPr lang="en-US" sz="1200" b="1" dirty="0">
+              <a:rPr lang="en-US" sz="1400" b="1" dirty="0">
                 <a:solidFill>
                   <a:srgbClr val="7B3A8E"/>
                 </a:solidFill>
@@ -6382,14 +6289,14 @@
               <a:buNone/>
             </a:pPr>
             <a:r>
-              <a:rPr lang="en-US" sz="1200" dirty="0">
+              <a:rPr lang="en-US" sz="1400" dirty="0">
                 <a:solidFill>
                   <a:srgbClr val="7B3A8E"/>
                 </a:solidFill>
               </a:rPr>
               <a:t>statistics   ·   sample   ·   mean   ·   median   ·   mode</a:t>
             </a:r>
-            <a:endParaRPr lang="en-US" sz="1200" dirty="0"/>
+            <a:endParaRPr lang="en-US" sz="1400" dirty="0"/>
           </a:p>
         </p:txBody>
       </p:sp>
@@ -6411,99 +6318,97 @@
           <a:ln/>
         </p:spPr>
         <p:txBody>
-          <a:bodyPr wrap="square" lIns="0" tIns="0" rIns="0" bIns="0" rtlCol="0" anchor="t">
-            <a:normAutofit/>
-          </a:bodyPr>
-          <a:lstStyle/>
-          <a:p>
-            <a:pPr marL="228600" indent="-228600">
+          <a:bodyPr wrap="square" lIns="0" tIns="0" rIns="0" bIns="0" rtlCol="0" anchor="t"/>
+          <a:lstStyle/>
+          <a:p>
+            <a:pPr marL="304800" indent="-304800">
               <a:spcAft>
-                <a:spcPts val="600"/>
+                <a:spcPts val="800"/>
               </a:spcAft>
               <a:buSzPct val="100000"/>
               <a:buChar char="•"/>
             </a:pPr>
             <a:r>
-              <a:rPr lang="en-US" sz="1700" dirty="0">
+              <a:rPr lang="en-US" sz="2000" dirty="0">
                 <a:solidFill>
                   <a:srgbClr val="141B26"/>
                 </a:solidFill>
               </a:rPr>
               <a:t>Statistics is collecting, analysing and presenting data.</a:t>
             </a:r>
-            <a:endParaRPr lang="en-US" sz="1700" dirty="0"/>
-          </a:p>
-          <a:p>
-            <a:pPr marL="228600" indent="-228600">
+            <a:endParaRPr lang="en-US" sz="2000" dirty="0"/>
+          </a:p>
+          <a:p>
+            <a:pPr marL="304800" indent="-304800">
               <a:spcAft>
-                <a:spcPts val="600"/>
+                <a:spcPts val="800"/>
               </a:spcAft>
               <a:buSzPct val="100000"/>
               <a:buChar char="•"/>
             </a:pPr>
             <a:r>
-              <a:rPr lang="en-US" sz="1700" dirty="0">
+              <a:rPr lang="en-US" sz="2000" dirty="0">
                 <a:solidFill>
                   <a:srgbClr val="141B26"/>
                 </a:solidFill>
               </a:rPr>
               <a:t>Collect data: use a sample to estimate values for a whole population.</a:t>
             </a:r>
-            <a:endParaRPr lang="en-US" sz="1700" dirty="0"/>
-          </a:p>
-          <a:p>
-            <a:pPr marL="228600" indent="-228600">
+            <a:endParaRPr lang="en-US" sz="2000" dirty="0"/>
+          </a:p>
+          <a:p>
+            <a:pPr marL="304800" indent="-304800">
               <a:spcAft>
-                <a:spcPts val="600"/>
+                <a:spcPts val="800"/>
               </a:spcAft>
               <a:buSzPct val="100000"/>
               <a:buChar char="•"/>
             </a:pPr>
             <a:r>
-              <a:rPr lang="en-US" sz="1700" dirty="0">
+              <a:rPr lang="en-US" sz="2000" dirty="0">
                 <a:solidFill>
                   <a:srgbClr val="141B26"/>
                 </a:solidFill>
               </a:rPr>
               <a:t>Draw conclusions: calculate averages (mean, median, mode); find patterns with graphs.</a:t>
             </a:r>
-            <a:endParaRPr lang="en-US" sz="1700" dirty="0"/>
-          </a:p>
-          <a:p>
-            <a:pPr marL="228600" indent="-228600">
+            <a:endParaRPr lang="en-US" sz="2000" dirty="0"/>
+          </a:p>
+          <a:p>
+            <a:pPr marL="304800" indent="-304800">
               <a:spcAft>
-                <a:spcPts val="600"/>
+                <a:spcPts val="800"/>
               </a:spcAft>
               <a:buSzPct val="100000"/>
               <a:buChar char="•"/>
             </a:pPr>
             <a:r>
-              <a:rPr lang="en-US" sz="1700" dirty="0">
+              <a:rPr lang="en-US" sz="2000" dirty="0">
                 <a:solidFill>
                   <a:srgbClr val="141B26"/>
                 </a:solidFill>
               </a:rPr>
               <a:t>Present findings and make predictions.</a:t>
             </a:r>
-            <a:endParaRPr lang="en-US" sz="1700" dirty="0"/>
-          </a:p>
-          <a:p>
-            <a:pPr marL="228600" indent="-228600">
+            <a:endParaRPr lang="en-US" sz="2000" dirty="0"/>
+          </a:p>
+          <a:p>
+            <a:pPr marL="304800" indent="-304800">
               <a:spcAft>
-                <a:spcPts val="600"/>
+                <a:spcPts val="800"/>
               </a:spcAft>
               <a:buSzPct val="100000"/>
               <a:buChar char="•"/>
             </a:pPr>
             <a:r>
-              <a:rPr lang="en-US" sz="1700" dirty="0">
+              <a:rPr lang="en-US" sz="2000" dirty="0">
                 <a:solidFill>
                   <a:srgbClr val="141B26"/>
                 </a:solidFill>
               </a:rPr>
               <a:t>Example: sleeve lengths of 12 men: 86, 88, 90, 90, 91, 92 cm. Mode 90, median 90, mean 89.5.</a:t>
             </a:r>
-            <a:endParaRPr lang="en-US" sz="1700" dirty="0"/>
+            <a:endParaRPr lang="en-US" sz="2000" dirty="0"/>
           </a:p>
         </p:txBody>
       </p:sp>
@@ -6550,16 +6455,14 @@
           <a:ln/>
         </p:spPr>
         <p:txBody>
-          <a:bodyPr wrap="square" lIns="0" tIns="0" rIns="0" bIns="0" rtlCol="0" anchor="ctr">
-            <a:normAutofit/>
-          </a:bodyPr>
+          <a:bodyPr wrap="square" lIns="0" tIns="0" rIns="0" bIns="0" rtlCol="0" anchor="ctr"/>
           <a:lstStyle/>
           <a:p>
             <a:pPr indent="0" marL="0">
               <a:buNone/>
             </a:pPr>
             <a:r>
-              <a:rPr lang="en-US" sz="1400" b="1" dirty="0">
+              <a:rPr lang="en-US" sz="1700" b="1" dirty="0">
                 <a:solidFill>
                   <a:srgbClr val="7B3A8E"/>
                 </a:solidFill>
@@ -6570,14 +6473,14 @@
               <a:buNone/>
             </a:pPr>
             <a:r>
-              <a:rPr lang="en-US" sz="1400" dirty="0">
+              <a:rPr lang="en-US" sz="1700" dirty="0">
                 <a:solidFill>
                   <a:srgbClr val="141B26"/>
                 </a:solidFill>
               </a:rPr>
               <a:t>Mean: add up and divide. Median: middle value in order. Mode: most common value.</a:t>
             </a:r>
-            <a:endParaRPr lang="en-US" sz="1400" dirty="0"/>
+            <a:endParaRPr lang="en-US" sz="1700" dirty="0"/>
           </a:p>
         </p:txBody>
       </p:sp>
@@ -6760,8 +6663,8 @@
         </p:nvSpPr>
         <p:spPr>
           <a:xfrm>
-            <a:off x="548640" y="6053328"/>
-            <a:ext cx="9601200" cy="292608"/>
+            <a:off x="548640" y="6035040"/>
+            <a:ext cx="9601200" cy="310896"/>
           </a:xfrm>
           <a:prstGeom prst="rect">
             <a:avLst/>
@@ -6777,7 +6680,7 @@
               <a:buNone/>
             </a:pPr>
             <a:r>
-              <a:rPr lang="en-US" sz="1200" b="1" dirty="0">
+              <a:rPr lang="en-US" sz="1400" b="1" dirty="0">
                 <a:solidFill>
                   <a:srgbClr val="7B3A8E"/>
                 </a:solidFill>
@@ -6788,14 +6691,14 @@
               <a:buNone/>
             </a:pPr>
             <a:r>
-              <a:rPr lang="en-US" sz="1200" dirty="0">
+              <a:rPr lang="en-US" sz="1400" dirty="0">
                 <a:solidFill>
                   <a:srgbClr val="7B3A8E"/>
                 </a:solidFill>
               </a:rPr>
               <a:t>probability   ·   percentage   ·   fraction   ·   decimal</a:t>
             </a:r>
-            <a:endParaRPr lang="en-US" sz="1200" dirty="0"/>
+            <a:endParaRPr lang="en-US" sz="1400" dirty="0"/>
           </a:p>
         </p:txBody>
       </p:sp>
@@ -6817,81 +6720,79 @@
           <a:ln/>
         </p:spPr>
         <p:txBody>
-          <a:bodyPr wrap="square" lIns="0" tIns="0" rIns="0" bIns="0" rtlCol="0" anchor="t">
-            <a:normAutofit/>
-          </a:bodyPr>
-          <a:lstStyle/>
-          <a:p>
-            <a:pPr marL="228600" indent="-228600">
+          <a:bodyPr wrap="square" lIns="0" tIns="0" rIns="0" bIns="0" rtlCol="0" anchor="t"/>
+          <a:lstStyle/>
+          <a:p>
+            <a:pPr marL="304800" indent="-304800">
               <a:spcAft>
-                <a:spcPts val="600"/>
+                <a:spcPts val="800"/>
               </a:spcAft>
               <a:buSzPct val="100000"/>
               <a:buChar char="•"/>
             </a:pPr>
             <a:r>
-              <a:rPr lang="en-US" sz="1600" dirty="0">
+              <a:rPr lang="en-US" sz="2000" dirty="0">
                 <a:solidFill>
                   <a:srgbClr val="141B26"/>
                 </a:solidFill>
               </a:rPr>
               <a:t>Probability is the chance of something happening.</a:t>
             </a:r>
-            <a:endParaRPr lang="en-US" sz="1700" dirty="0"/>
-          </a:p>
-          <a:p>
-            <a:pPr marL="228600" indent="-228600">
+            <a:endParaRPr lang="en-US" sz="2000" dirty="0"/>
+          </a:p>
+          <a:p>
+            <a:pPr marL="304800" indent="-304800">
               <a:spcAft>
-                <a:spcPts val="600"/>
+                <a:spcPts val="800"/>
               </a:spcAft>
               <a:buSzPct val="100000"/>
               <a:buChar char="•"/>
             </a:pPr>
             <a:r>
-              <a:rPr lang="en-US" sz="1600" dirty="0">
+              <a:rPr lang="en-US" sz="2000" dirty="0">
                 <a:solidFill>
                   <a:srgbClr val="141B26"/>
                 </a:solidFill>
               </a:rPr>
               <a:t>0% (0) is impossible; 100% (1) is certain; 50% (1/2, 0.5) is an even chance.</a:t>
             </a:r>
-            <a:endParaRPr lang="en-US" sz="1700" dirty="0"/>
-          </a:p>
-          <a:p>
-            <a:pPr marL="228600" indent="-228600">
+            <a:endParaRPr lang="en-US" sz="2000" dirty="0"/>
+          </a:p>
+          <a:p>
+            <a:pPr marL="304800" indent="-304800">
               <a:spcAft>
-                <a:spcPts val="600"/>
+                <a:spcPts val="800"/>
               </a:spcAft>
               <a:buSzPct val="100000"/>
               <a:buChar char="•"/>
             </a:pPr>
             <a:r>
-              <a:rPr lang="en-US" sz="1600" dirty="0">
+              <a:rPr lang="en-US" sz="2000" dirty="0">
                 <a:solidFill>
                   <a:srgbClr val="141B26"/>
                 </a:solidFill>
               </a:rPr>
               <a:t>To change a percentage to a decimal: write it over 100 and divide. 52% = 52/100 = 0.52.</a:t>
             </a:r>
-            <a:endParaRPr lang="en-US" sz="1700" dirty="0"/>
-          </a:p>
-          <a:p>
-            <a:pPr marL="228600" indent="-228600">
+            <a:endParaRPr lang="en-US" sz="2000" dirty="0"/>
+          </a:p>
+          <a:p>
+            <a:pPr marL="304800" indent="-304800">
               <a:spcAft>
-                <a:spcPts val="600"/>
+                <a:spcPts val="800"/>
               </a:spcAft>
               <a:buSzPct val="100000"/>
               <a:buChar char="•"/>
             </a:pPr>
             <a:r>
-              <a:rPr lang="en-US" sz="1600" dirty="0">
+              <a:rPr lang="en-US" sz="2000" dirty="0">
                 <a:solidFill>
                   <a:srgbClr val="141B26"/>
                 </a:solidFill>
               </a:rPr>
               <a:t>With one dice: probability of a 1 is 1/6; of 'not 1' is 5/6.</a:t>
             </a:r>
-            <a:endParaRPr lang="en-US" sz="1700" dirty="0"/>
+            <a:endParaRPr lang="en-US" sz="2000" dirty="0"/>
           </a:p>
         </p:txBody>
       </p:sp>
@@ -6962,16 +6863,14 @@
           <a:ln/>
         </p:spPr>
         <p:txBody>
-          <a:bodyPr wrap="square" lIns="0" tIns="0" rIns="0" bIns="0" rtlCol="0" anchor="ctr">
-            <a:normAutofit/>
-          </a:bodyPr>
+          <a:bodyPr wrap="square" lIns="0" tIns="0" rIns="0" bIns="0" rtlCol="0" anchor="ctr"/>
           <a:lstStyle/>
           <a:p>
             <a:pPr indent="0" marL="0">
               <a:buNone/>
             </a:pPr>
             <a:r>
-              <a:rPr lang="en-US" sz="1400" b="1" dirty="0">
+              <a:rPr lang="en-US" sz="1700" b="1" dirty="0">
                 <a:solidFill>
                   <a:srgbClr val="7B3A8E"/>
                 </a:solidFill>
@@ -6982,14 +6881,14 @@
               <a:buNone/>
             </a:pPr>
             <a:r>
-              <a:rPr lang="en-US" sz="1400" dirty="0">
+              <a:rPr lang="en-US" sz="1700" dirty="0">
                 <a:solidFill>
                   <a:srgbClr val="141B26"/>
                 </a:solidFill>
               </a:rPr>
               <a:t>The same probability can be written as a percentage, a fraction or a decimal.</a:t>
             </a:r>
-            <a:endParaRPr lang="en-US" sz="1400" dirty="0"/>
+            <a:endParaRPr lang="en-US" sz="1700" dirty="0"/>
           </a:p>
         </p:txBody>
       </p:sp>
@@ -7172,8 +7071,8 @@
         </p:nvSpPr>
         <p:spPr>
           <a:xfrm>
-            <a:off x="548640" y="6053328"/>
-            <a:ext cx="9601200" cy="292608"/>
+            <a:off x="548640" y="6035040"/>
+            <a:ext cx="9601200" cy="310896"/>
           </a:xfrm>
           <a:prstGeom prst="rect">
             <a:avLst/>
@@ -7189,7 +7088,7 @@
               <a:buNone/>
             </a:pPr>
             <a:r>
-              <a:rPr lang="en-US" sz="1200" b="1" dirty="0">
+              <a:rPr lang="en-US" sz="1400" b="1" dirty="0">
                 <a:solidFill>
                   <a:srgbClr val="7B3A8E"/>
                 </a:solidFill>
@@ -7200,14 +7099,14 @@
               <a:buNone/>
             </a:pPr>
             <a:r>
-              <a:rPr lang="en-US" sz="1200" dirty="0">
+              <a:rPr lang="en-US" sz="1400" dirty="0">
                 <a:solidFill>
                   <a:srgbClr val="7B3A8E"/>
                 </a:solidFill>
               </a:rPr>
               <a:t>experimental probability   ·   theoretical probability</a:t>
             </a:r>
-            <a:endParaRPr lang="en-US" sz="1200" dirty="0"/>
+            <a:endParaRPr lang="en-US" sz="1400" dirty="0"/>
           </a:p>
         </p:txBody>
       </p:sp>
@@ -7263,14 +7162,14 @@
               <a:buNone/>
             </a:pPr>
             <a:r>
-              <a:rPr lang="en-US" sz="2000" b="1" dirty="0">
+              <a:rPr lang="en-US" sz="2200" b="1" dirty="0">
                 <a:solidFill>
                   <a:srgbClr val="0F2A5F"/>
                 </a:solidFill>
               </a:rPr>
               <a:t>Experimental probability</a:t>
             </a:r>
-            <a:endParaRPr lang="en-US" sz="2000" dirty="0"/>
+            <a:endParaRPr lang="en-US" sz="2200" dirty="0"/>
           </a:p>
         </p:txBody>
       </p:sp>
@@ -7292,81 +7191,79 @@
           <a:ln/>
         </p:spPr>
         <p:txBody>
-          <a:bodyPr wrap="square" lIns="0" tIns="0" rIns="0" bIns="0" rtlCol="0" anchor="t">
-            <a:normAutofit/>
-          </a:bodyPr>
-          <a:lstStyle/>
-          <a:p>
-            <a:pPr marL="228600" indent="-228600">
+          <a:bodyPr wrap="square" lIns="0" tIns="0" rIns="0" bIns="0" rtlCol="0" anchor="t"/>
+          <a:lstStyle/>
+          <a:p>
+            <a:pPr marL="304800" indent="-304800">
               <a:spcAft>
-                <a:spcPts val="600"/>
+                <a:spcPts val="800"/>
               </a:spcAft>
               <a:buSzPct val="100000"/>
               <a:buChar char="•"/>
             </a:pPr>
             <a:r>
-              <a:rPr lang="en-US" sz="1500" dirty="0">
+              <a:rPr lang="en-US" sz="1800" dirty="0">
                 <a:solidFill>
                   <a:srgbClr val="141B26"/>
                 </a:solidFill>
               </a:rPr>
               <a:t>Worked out from results.</a:t>
             </a:r>
-            <a:endParaRPr lang="en-US" sz="1500" dirty="0"/>
-          </a:p>
-          <a:p>
-            <a:pPr marL="228600" indent="-228600">
+            <a:endParaRPr lang="en-US" sz="1800" dirty="0"/>
+          </a:p>
+          <a:p>
+            <a:pPr marL="304800" indent="-304800">
               <a:spcAft>
-                <a:spcPts val="600"/>
+                <a:spcPts val="800"/>
               </a:spcAft>
               <a:buSzPct val="100000"/>
               <a:buChar char="•"/>
             </a:pPr>
             <a:r>
-              <a:rPr lang="en-US" sz="1500" dirty="0">
+              <a:rPr lang="en-US" sz="1800" dirty="0">
                 <a:solidFill>
                   <a:srgbClr val="141B26"/>
                 </a:solidFill>
               </a:rPr>
               <a:t>Flip a coin 100 times: 52 heads, so 52/100 = 52%.</a:t>
             </a:r>
-            <a:endParaRPr lang="en-US" sz="1500" dirty="0"/>
-          </a:p>
-          <a:p>
-            <a:pPr marL="228600" indent="-228600">
+            <a:endParaRPr lang="en-US" sz="1800" dirty="0"/>
+          </a:p>
+          <a:p>
+            <a:pPr marL="304800" indent="-304800">
               <a:spcAft>
-                <a:spcPts val="600"/>
+                <a:spcPts val="800"/>
               </a:spcAft>
               <a:buSzPct val="100000"/>
               <a:buChar char="•"/>
             </a:pPr>
             <a:r>
-              <a:rPr lang="en-US" sz="1500" dirty="0">
+              <a:rPr lang="en-US" sz="1800" dirty="0">
                 <a:solidFill>
                   <a:srgbClr val="141B26"/>
                 </a:solidFill>
               </a:rPr>
               <a:t>Gets closer to the true value with more trials.</a:t>
             </a:r>
-            <a:endParaRPr lang="en-US" sz="1500" dirty="0"/>
-          </a:p>
-          <a:p>
-            <a:pPr marL="228600" indent="-228600">
+            <a:endParaRPr lang="en-US" sz="1800" dirty="0"/>
+          </a:p>
+          <a:p>
+            <a:pPr marL="304800" indent="-304800">
               <a:spcAft>
-                <a:spcPts val="600"/>
+                <a:spcPts val="800"/>
               </a:spcAft>
               <a:buSzPct val="100000"/>
               <a:buChar char="•"/>
             </a:pPr>
             <a:r>
-              <a:rPr lang="en-US" sz="1500" dirty="0">
+              <a:rPr lang="en-US" sz="1800" dirty="0">
                 <a:solidFill>
                   <a:srgbClr val="141B26"/>
                 </a:solidFill>
               </a:rPr>
               <a:t>Used when we cannot reason out every outcome, e.g. weather.</a:t>
             </a:r>
-            <a:endParaRPr lang="en-US" sz="1500" dirty="0"/>
+            <a:endParaRPr lang="en-US" sz="1800" dirty="0"/>
           </a:p>
         </p:txBody>
       </p:sp>
@@ -7422,14 +7319,14 @@
               <a:buNone/>
             </a:pPr>
             <a:r>
-              <a:rPr lang="en-US" sz="2000" b="1" dirty="0">
+              <a:rPr lang="en-US" sz="2200" b="1" dirty="0">
                 <a:solidFill>
                   <a:srgbClr val="0F2A5F"/>
                 </a:solidFill>
               </a:rPr>
               <a:t>Theoretical probability</a:t>
             </a:r>
-            <a:endParaRPr lang="en-US" sz="2000" dirty="0"/>
+            <a:endParaRPr lang="en-US" sz="2200" dirty="0"/>
           </a:p>
         </p:txBody>
       </p:sp>
@@ -7451,81 +7348,79 @@
           <a:ln/>
         </p:spPr>
         <p:txBody>
-          <a:bodyPr wrap="square" lIns="0" tIns="0" rIns="0" bIns="0" rtlCol="0" anchor="t">
-            <a:normAutofit/>
-          </a:bodyPr>
-          <a:lstStyle/>
-          <a:p>
-            <a:pPr marL="228600" indent="-228600">
+          <a:bodyPr wrap="square" lIns="0" tIns="0" rIns="0" bIns="0" rtlCol="0" anchor="t"/>
+          <a:lstStyle/>
+          <a:p>
+            <a:pPr marL="304800" indent="-304800">
               <a:spcAft>
-                <a:spcPts val="600"/>
+                <a:spcPts val="800"/>
               </a:spcAft>
               <a:buSzPct val="100000"/>
               <a:buChar char="•"/>
             </a:pPr>
             <a:r>
-              <a:rPr lang="en-US" sz="1500" dirty="0">
+              <a:rPr lang="en-US" sz="1800" dirty="0">
                 <a:solidFill>
                   <a:srgbClr val="141B26"/>
                 </a:solidFill>
               </a:rPr>
               <a:t>Worked out by reasoning about all the outcomes.</a:t>
             </a:r>
-            <a:endParaRPr lang="en-US" sz="1500" dirty="0"/>
-          </a:p>
-          <a:p>
-            <a:pPr marL="228600" indent="-228600">
+            <a:endParaRPr lang="en-US" sz="1800" dirty="0"/>
+          </a:p>
+          <a:p>
+            <a:pPr marL="304800" indent="-304800">
               <a:spcAft>
-                <a:spcPts val="600"/>
+                <a:spcPts val="800"/>
               </a:spcAft>
               <a:buSzPct val="100000"/>
               <a:buChar char="•"/>
             </a:pPr>
             <a:r>
-              <a:rPr lang="en-US" sz="1500" dirty="0">
+              <a:rPr lang="en-US" sz="1800" dirty="0">
                 <a:solidFill>
                   <a:srgbClr val="141B26"/>
                 </a:solidFill>
               </a:rPr>
               <a:t>A fair coin: 1/2. One dice: 1/6 for each number.</a:t>
             </a:r>
-            <a:endParaRPr lang="en-US" sz="1500" dirty="0"/>
-          </a:p>
-          <a:p>
-            <a:pPr marL="228600" indent="-228600">
+            <a:endParaRPr lang="en-US" sz="1800" dirty="0"/>
+          </a:p>
+          <a:p>
+            <a:pPr marL="304800" indent="-304800">
               <a:spcAft>
-                <a:spcPts val="600"/>
+                <a:spcPts val="800"/>
               </a:spcAft>
               <a:buSzPct val="100000"/>
               <a:buChar char="•"/>
             </a:pPr>
             <a:r>
-              <a:rPr lang="en-US" sz="1500" dirty="0">
+              <a:rPr lang="en-US" sz="1800" dirty="0">
                 <a:solidFill>
                   <a:srgbClr val="141B26"/>
                 </a:solidFill>
               </a:rPr>
               <a:t>Inheritance: if one parent has achondroplasia, each child has a 50% chance.</a:t>
             </a:r>
-            <a:endParaRPr lang="en-US" sz="1500" dirty="0"/>
-          </a:p>
-          <a:p>
-            <a:pPr marL="228600" indent="-228600">
+            <a:endParaRPr lang="en-US" sz="1800" dirty="0"/>
+          </a:p>
+          <a:p>
+            <a:pPr marL="304800" indent="-304800">
               <a:spcAft>
-                <a:spcPts val="600"/>
+                <a:spcPts val="800"/>
               </a:spcAft>
               <a:buSzPct val="100000"/>
               <a:buChar char="•"/>
             </a:pPr>
             <a:r>
-              <a:rPr lang="en-US" sz="1500" dirty="0">
+              <a:rPr lang="en-US" sz="1800" dirty="0">
                 <a:solidFill>
                   <a:srgbClr val="141B26"/>
                 </a:solidFill>
               </a:rPr>
               <a:t>Does not change because of earlier results.</a:t>
             </a:r>
-            <a:endParaRPr lang="en-US" sz="1500" dirty="0"/>
+            <a:endParaRPr lang="en-US" sz="1800" dirty="0"/>
           </a:p>
         </p:txBody>
       </p:sp>
@@ -7572,16 +7467,14 @@
           <a:ln/>
         </p:spPr>
         <p:txBody>
-          <a:bodyPr wrap="square" lIns="0" tIns="0" rIns="0" bIns="0" rtlCol="0" anchor="ctr">
-            <a:normAutofit/>
-          </a:bodyPr>
+          <a:bodyPr wrap="square" lIns="0" tIns="0" rIns="0" bIns="0" rtlCol="0" anchor="ctr"/>
           <a:lstStyle/>
           <a:p>
             <a:pPr indent="0" marL="0">
               <a:buNone/>
             </a:pPr>
             <a:r>
-              <a:rPr lang="en-US" sz="1400" b="1" dirty="0">
+              <a:rPr lang="en-US" sz="1700" b="1" dirty="0">
                 <a:solidFill>
                   <a:srgbClr val="7B3A8E"/>
                 </a:solidFill>
@@ -7592,14 +7485,14 @@
               <a:buNone/>
             </a:pPr>
             <a:r>
-              <a:rPr lang="en-US" sz="1400" dirty="0">
+              <a:rPr lang="en-US" sz="1700" dirty="0">
                 <a:solidFill>
                   <a:srgbClr val="141B26"/>
                 </a:solidFill>
               </a:rPr>
               <a:t>Experimental comes from doing it; theoretical comes from thinking about it. With many trials they get close.</a:t>
             </a:r>
-            <a:endParaRPr lang="en-US" sz="1400" dirty="0"/>
+            <a:endParaRPr lang="en-US" sz="1700" dirty="0"/>
           </a:p>
         </p:txBody>
       </p:sp>
@@ -7782,8 +7675,8 @@
         </p:nvSpPr>
         <p:spPr>
           <a:xfrm>
-            <a:off x="548640" y="6053328"/>
-            <a:ext cx="9601200" cy="292608"/>
+            <a:off x="548640" y="6035040"/>
+            <a:ext cx="9601200" cy="310896"/>
           </a:xfrm>
           <a:prstGeom prst="rect">
             <a:avLst/>
@@ -7799,7 +7692,7 @@
               <a:buNone/>
             </a:pPr>
             <a:r>
-              <a:rPr lang="en-US" sz="1200" b="1" dirty="0">
+              <a:rPr lang="en-US" sz="1400" b="1" dirty="0">
                 <a:solidFill>
                   <a:srgbClr val="7B3A8E"/>
                 </a:solidFill>
@@ -7810,14 +7703,14 @@
               <a:buNone/>
             </a:pPr>
             <a:r>
-              <a:rPr lang="en-US" sz="1200" dirty="0">
+              <a:rPr lang="en-US" sz="1400" dirty="0">
                 <a:solidFill>
                   <a:srgbClr val="7B3A8E"/>
                 </a:solidFill>
               </a:rPr>
               <a:t>normal distribution   ·   mean   ·   median   ·   mode</a:t>
             </a:r>
-            <a:endParaRPr lang="en-US" sz="1200" dirty="0"/>
+            <a:endParaRPr lang="en-US" sz="1400" dirty="0"/>
           </a:p>
         </p:txBody>
       </p:sp>
@@ -7855,63 +7748,61 @@
           <a:ln/>
         </p:spPr>
         <p:txBody>
-          <a:bodyPr wrap="square" lIns="0" tIns="0" rIns="0" bIns="0" rtlCol="0" anchor="t">
-            <a:normAutofit/>
-          </a:bodyPr>
-          <a:lstStyle/>
-          <a:p>
-            <a:pPr marL="228600" indent="-228600">
+          <a:bodyPr wrap="square" lIns="0" tIns="0" rIns="0" bIns="0" rtlCol="0" anchor="t"/>
+          <a:lstStyle/>
+          <a:p>
+            <a:pPr marL="304800" indent="-304800">
               <a:spcAft>
-                <a:spcPts val="600"/>
+                <a:spcPts val="800"/>
               </a:spcAft>
               <a:buSzPct val="100000"/>
               <a:buChar char="•"/>
             </a:pPr>
             <a:r>
-              <a:rPr lang="en-US" sz="1500" dirty="0">
+              <a:rPr lang="en-US" sz="1800" dirty="0">
                 <a:solidFill>
                   <a:srgbClr val="141B26"/>
                 </a:solidFill>
               </a:rPr>
               <a:t>A shopper picked at random is much more likely to need 90 cm sleeves than 95 cm.</a:t>
             </a:r>
-            <a:endParaRPr lang="en-US" sz="1500" dirty="0"/>
-          </a:p>
-          <a:p>
-            <a:pPr marL="228600" indent="-228600">
+            <a:endParaRPr lang="en-US" sz="1800" dirty="0"/>
+          </a:p>
+          <a:p>
+            <a:pPr marL="304800" indent="-304800">
               <a:spcAft>
-                <a:spcPts val="600"/>
+                <a:spcPts val="800"/>
               </a:spcAft>
               <a:buSzPct val="100000"/>
               <a:buChar char="•"/>
             </a:pPr>
             <a:r>
-              <a:rPr lang="en-US" sz="1500" dirty="0">
+              <a:rPr lang="en-US" sz="1800" dirty="0">
                 <a:solidFill>
                   <a:srgbClr val="141B26"/>
                 </a:solidFill>
               </a:rPr>
               <a:t>Probability of needing 95 cm: 20 out of 102, about 20%.</a:t>
             </a:r>
-            <a:endParaRPr lang="en-US" sz="1500" dirty="0"/>
-          </a:p>
-          <a:p>
-            <a:pPr marL="228600" indent="-228600">
+            <a:endParaRPr lang="en-US" sz="1800" dirty="0"/>
+          </a:p>
+          <a:p>
+            <a:pPr marL="304800" indent="-304800">
               <a:spcAft>
-                <a:spcPts val="600"/>
+                <a:spcPts val="800"/>
               </a:spcAft>
               <a:buSzPct val="100000"/>
               <a:buChar char="•"/>
             </a:pPr>
             <a:r>
-              <a:rPr lang="en-US" sz="1500" dirty="0">
+              <a:rPr lang="en-US" sz="1800" dirty="0">
                 <a:solidFill>
                   <a:srgbClr val="141B26"/>
                 </a:solidFill>
               </a:rPr>
               <a:t>In a normal distribution the mean, median and mode are the same value.</a:t>
             </a:r>
-            <a:endParaRPr lang="en-US" sz="1500" dirty="0"/>
+            <a:endParaRPr lang="en-US" sz="1800" dirty="0"/>
           </a:p>
         </p:txBody>
       </p:sp>
@@ -7958,16 +7849,14 @@
           <a:ln/>
         </p:spPr>
         <p:txBody>
-          <a:bodyPr wrap="square" lIns="0" tIns="0" rIns="0" bIns="0" rtlCol="0" anchor="ctr">
-            <a:normAutofit/>
-          </a:bodyPr>
+          <a:bodyPr wrap="square" lIns="0" tIns="0" rIns="0" bIns="0" rtlCol="0" anchor="ctr"/>
           <a:lstStyle/>
           <a:p>
             <a:pPr indent="0" marL="0">
               <a:buNone/>
             </a:pPr>
             <a:r>
-              <a:rPr lang="en-US" sz="1400" b="1" dirty="0">
+              <a:rPr lang="en-US" sz="1700" b="1" dirty="0">
                 <a:solidFill>
                   <a:srgbClr val="7B3A8E"/>
                 </a:solidFill>
@@ -7978,14 +7867,14 @@
               <a:buNone/>
             </a:pPr>
             <a:r>
-              <a:rPr lang="en-US" sz="1400" dirty="0">
+              <a:rPr lang="en-US" sz="1700" dirty="0">
                 <a:solidFill>
                   <a:srgbClr val="141B26"/>
                 </a:solidFill>
               </a:rPr>
               <a:t>A bell-shaped graph tells you how likely each value is.</a:t>
             </a:r>
-            <a:endParaRPr lang="en-US" sz="1400" dirty="0"/>
+            <a:endParaRPr lang="en-US" sz="1700" dirty="0"/>
           </a:p>
         </p:txBody>
       </p:sp>
@@ -8185,14 +8074,14 @@
               <a:buNone/>
             </a:pPr>
             <a:r>
-              <a:rPr lang="en-US" sz="1400" i="1" dirty="0">
+              <a:rPr lang="en-US" sz="1600" i="1" dirty="0">
                 <a:solidFill>
                   <a:srgbClr val="5B6574"/>
                 </a:solidFill>
               </a:rPr>
               <a:t>Mini whiteboards. Write the answer, then we check.</a:t>
             </a:r>
-            <a:endParaRPr lang="en-US" sz="1400" dirty="0"/>
+            <a:endParaRPr lang="en-US" sz="1600" dirty="0"/>
           </a:p>
         </p:txBody>
       </p:sp>
@@ -8241,16 +8130,14 @@
           <a:ln/>
         </p:spPr>
         <p:txBody>
-          <a:bodyPr wrap="square" lIns="0" tIns="0" rIns="0" bIns="0" rtlCol="0" anchor="ctr">
-            <a:normAutofit/>
-          </a:bodyPr>
+          <a:bodyPr wrap="square" lIns="0" tIns="0" rIns="0" bIns="0" rtlCol="0" anchor="ctr"/>
           <a:lstStyle/>
           <a:p>
             <a:pPr indent="0" marL="0">
               <a:buNone/>
             </a:pPr>
             <a:r>
-              <a:rPr lang="en-US" sz="1600" b="1" dirty="0">
+              <a:rPr lang="en-US" sz="2000" b="1" dirty="0">
                 <a:solidFill>
                   <a:srgbClr val="7B3A8E"/>
                 </a:solidFill>
@@ -8261,14 +8148,14 @@
               <a:buNone/>
             </a:pPr>
             <a:r>
-              <a:rPr lang="en-US" sz="1600" dirty="0">
+              <a:rPr lang="en-US" sz="2000" dirty="0">
                 <a:solidFill>
                   <a:srgbClr val="141B26"/>
                 </a:solidFill>
               </a:rPr>
               <a:t>Write 25% as a fraction.</a:t>
             </a:r>
-            <a:endParaRPr lang="en-US" sz="1600" dirty="0"/>
+            <a:endParaRPr lang="en-US" sz="2000" dirty="0"/>
           </a:p>
         </p:txBody>
       </p:sp>
@@ -8317,16 +8204,14 @@
           <a:ln/>
         </p:spPr>
         <p:txBody>
-          <a:bodyPr wrap="square" lIns="0" tIns="0" rIns="0" bIns="0" rtlCol="0" anchor="ctr">
-            <a:normAutofit/>
-          </a:bodyPr>
+          <a:bodyPr wrap="square" lIns="0" tIns="0" rIns="0" bIns="0" rtlCol="0" anchor="ctr"/>
           <a:lstStyle/>
           <a:p>
             <a:pPr indent="0" marL="0">
               <a:buNone/>
             </a:pPr>
             <a:r>
-              <a:rPr lang="en-US" sz="1600" b="1" dirty="0">
+              <a:rPr lang="en-US" sz="2000" b="1" dirty="0">
                 <a:solidFill>
                   <a:srgbClr val="7B3A8E"/>
                 </a:solidFill>
@@ -8337,14 +8222,14 @@
               <a:buNone/>
             </a:pPr>
             <a:r>
-              <a:rPr lang="en-US" sz="1600" dirty="0">
+              <a:rPr lang="en-US" sz="2000" dirty="0">
                 <a:solidFill>
                   <a:srgbClr val="141B26"/>
                 </a:solidFill>
               </a:rPr>
               <a:t>Write 0.75 as a percentage.</a:t>
             </a:r>
-            <a:endParaRPr lang="en-US" sz="1600" dirty="0"/>
+            <a:endParaRPr lang="en-US" sz="2000" dirty="0"/>
           </a:p>
         </p:txBody>
       </p:sp>
@@ -8393,16 +8278,14 @@
           <a:ln/>
         </p:spPr>
         <p:txBody>
-          <a:bodyPr wrap="square" lIns="0" tIns="0" rIns="0" bIns="0" rtlCol="0" anchor="ctr">
-            <a:normAutofit/>
-          </a:bodyPr>
+          <a:bodyPr wrap="square" lIns="0" tIns="0" rIns="0" bIns="0" rtlCol="0" anchor="ctr"/>
           <a:lstStyle/>
           <a:p>
             <a:pPr indent="0" marL="0">
               <a:buNone/>
             </a:pPr>
             <a:r>
-              <a:rPr lang="en-US" sz="1600" b="1" dirty="0">
+              <a:rPr lang="en-US" sz="2000" b="1" dirty="0">
                 <a:solidFill>
                   <a:srgbClr val="7B3A8E"/>
                 </a:solidFill>
@@ -8413,14 +8296,14 @@
               <a:buNone/>
             </a:pPr>
             <a:r>
-              <a:rPr lang="en-US" sz="1600" dirty="0">
+              <a:rPr lang="en-US" sz="2000" dirty="0">
                 <a:solidFill>
                   <a:srgbClr val="141B26"/>
                 </a:solidFill>
               </a:rPr>
               <a:t>What is the theoretical probability of rolling a 6 with one dice?</a:t>
             </a:r>
-            <a:endParaRPr lang="en-US" sz="1600" dirty="0"/>
+            <a:endParaRPr lang="en-US" sz="2000" dirty="0"/>
           </a:p>
         </p:txBody>
       </p:sp>
@@ -8469,16 +8352,14 @@
           <a:ln/>
         </p:spPr>
         <p:txBody>
-          <a:bodyPr wrap="square" lIns="0" tIns="0" rIns="0" bIns="0" rtlCol="0" anchor="ctr">
-            <a:normAutofit/>
-          </a:bodyPr>
+          <a:bodyPr wrap="square" lIns="0" tIns="0" rIns="0" bIns="0" rtlCol="0" anchor="ctr"/>
           <a:lstStyle/>
           <a:p>
             <a:pPr indent="0" marL="0">
               <a:buNone/>
             </a:pPr>
             <a:r>
-              <a:rPr lang="en-US" sz="1600" b="1" dirty="0">
+              <a:rPr lang="en-US" sz="2000" b="1" dirty="0">
                 <a:solidFill>
                   <a:srgbClr val="7B3A8E"/>
                 </a:solidFill>
@@ -8489,14 +8370,14 @@
               <a:buNone/>
             </a:pPr>
             <a:r>
-              <a:rPr lang="en-US" sz="1600" dirty="0">
+              <a:rPr lang="en-US" sz="2000" dirty="0">
                 <a:solidFill>
                   <a:srgbClr val="141B26"/>
                 </a:solidFill>
               </a:rPr>
               <a:t>Write 'impossible' as a decimal.</a:t>
             </a:r>
-            <a:endParaRPr lang="en-US" sz="1600" dirty="0"/>
+            <a:endParaRPr lang="en-US" sz="2000" dirty="0"/>
           </a:p>
         </p:txBody>
       </p:sp>
@@ -8545,16 +8426,14 @@
           <a:ln/>
         </p:spPr>
         <p:txBody>
-          <a:bodyPr wrap="square" lIns="0" tIns="0" rIns="0" bIns="0" rtlCol="0" anchor="ctr">
-            <a:normAutofit/>
-          </a:bodyPr>
+          <a:bodyPr wrap="square" lIns="0" tIns="0" rIns="0" bIns="0" rtlCol="0" anchor="ctr"/>
           <a:lstStyle/>
           <a:p>
             <a:pPr indent="0" marL="0">
               <a:buNone/>
             </a:pPr>
             <a:r>
-              <a:rPr lang="en-US" sz="1600" b="1" dirty="0">
+              <a:rPr lang="en-US" sz="2000" b="1" dirty="0">
                 <a:solidFill>
                   <a:srgbClr val="7B3A8E"/>
                 </a:solidFill>
@@ -8565,14 +8444,14 @@
               <a:buNone/>
             </a:pPr>
             <a:r>
-              <a:rPr lang="en-US" sz="1600" dirty="0">
+              <a:rPr lang="en-US" sz="2000" dirty="0">
                 <a:solidFill>
                   <a:srgbClr val="141B26"/>
                 </a:solidFill>
               </a:rPr>
               <a:t>A coin landed heads 48 times in 100 flips. What is the experimental probability of heads?</a:t>
             </a:r>
-            <a:endParaRPr lang="en-US" sz="1600" dirty="0"/>
+            <a:endParaRPr lang="en-US" sz="2000" dirty="0"/>
           </a:p>
         </p:txBody>
       </p:sp>
